--- a/examples/ppt/animations.pptx
+++ b/examples/ppt/animations.pptx
@@ -5,12 +5,13 @@
     <p:sldMasterId xmlns:r="http://schemas.openxmlformats.org/officeDocument/2006/relationships" id="2147483648" r:id="rId1"/>
   </p:sldMasterIdLst>
   <p:sldIdLst>
-    <p:sldId id="256" r:id="R391d5042e60843ca"/>
-    <p:sldId id="257" r:id="R2a3fa7f232f74e75"/>
-    <p:sldId id="258" r:id="R7997b1dab75d442b"/>
-    <p:sldId id="259" r:id="Rc491e24c33134296"/>
-    <p:sldId id="260" r:id="R3db01a83a9814872"/>
-    <p:sldId id="261" r:id="Rda816efe49e44593"/>
+    <p:sldId id="256" r:id="Rcaba4de090b7411b"/>
+    <p:sldId id="257" r:id="Re5db2d74e08847eb"/>
+    <p:sldId id="258" r:id="R0f739838f1ab4279"/>
+    <p:sldId id="259" r:id="Rb26eced928884529"/>
+    <p:sldId id="260" r:id="R503c3a1af5c44cd7"/>
+    <p:sldId id="261" r:id="Re2742c211d744623"/>
+    <p:sldId id="262" r:id="R4549fd0c3c5c4d47"/>
   </p:sldIdLst>
   <p:sldSz cx="12192000" cy="6858000"/>
   <p:notesSz cx="6858000" cy="9144000"/>
@@ -392,7 +393,7 @@
                   <a:srgbClr val="85C1E9"/>
                 </a:solidFill>
               </a:rPr>
-              <a:t>Every animation effect in officecli</a:t>
+              <a:t>The pptx animation element — every prop that round-trips</a:t>
             </a:r>
             <a:endParaRPr lang="en-US"/>
           </a:p>
@@ -461,7 +462,7 @@
         <p:spPr>
           <a:xfrm xmlns:a="http://schemas.openxmlformats.org/drawingml/2006/main">
             <a:off x="360000" y="1440000"/>
-            <a:ext cx="1800000" cy="720000"/>
+            <a:ext cx="2160000" cy="720000"/>
           </a:xfrm>
           <a:prstGeom xmlns:a="http://schemas.openxmlformats.org/drawingml/2006/main" prst="roundRect">
             <a:avLst/>
@@ -475,7 +476,7 @@
           <a:lstStyle xmlns:a="http://schemas.openxmlformats.org/drawingml/2006/main"/>
           <a:p xmlns:a="http://schemas.openxmlformats.org/drawingml/2006/main">
             <a:r>
-              <a:rPr lang="en-US" sz="1400">
+              <a:rPr lang="en-US" sz="1300">
                 <a:solidFill>
                   <a:srgbClr val="FFFFFF"/>
                 </a:solidFill>
@@ -496,7 +497,7 @@
         <p:spPr>
           <a:xfrm xmlns:a="http://schemas.openxmlformats.org/drawingml/2006/main">
             <a:off x="2520000" y="1440000"/>
-            <a:ext cx="1800000" cy="720000"/>
+            <a:ext cx="2160000" cy="720000"/>
           </a:xfrm>
           <a:prstGeom xmlns:a="http://schemas.openxmlformats.org/drawingml/2006/main" prst="roundRect">
             <a:avLst/>
@@ -510,7 +511,7 @@
           <a:lstStyle xmlns:a="http://schemas.openxmlformats.org/drawingml/2006/main"/>
           <a:p xmlns:a="http://schemas.openxmlformats.org/drawingml/2006/main">
             <a:r>
-              <a:rPr lang="en-US" sz="1400">
+              <a:rPr lang="en-US" sz="1300">
                 <a:solidFill>
                   <a:srgbClr val="FFFFFF"/>
                 </a:solidFill>
@@ -531,7 +532,7 @@
         <p:spPr>
           <a:xfrm xmlns:a="http://schemas.openxmlformats.org/drawingml/2006/main">
             <a:off x="4680000" y="1440000"/>
-            <a:ext cx="1800000" cy="720000"/>
+            <a:ext cx="2160000" cy="720000"/>
           </a:xfrm>
           <a:prstGeom xmlns:a="http://schemas.openxmlformats.org/drawingml/2006/main" prst="roundRect">
             <a:avLst/>
@@ -545,7 +546,7 @@
           <a:lstStyle xmlns:a="http://schemas.openxmlformats.org/drawingml/2006/main"/>
           <a:p xmlns:a="http://schemas.openxmlformats.org/drawingml/2006/main">
             <a:r>
-              <a:rPr lang="en-US" sz="1400">
+              <a:rPr lang="en-US" sz="1300">
                 <a:solidFill>
                   <a:srgbClr val="FFFFFF"/>
                 </a:solidFill>
@@ -566,7 +567,7 @@
         <p:spPr>
           <a:xfrm xmlns:a="http://schemas.openxmlformats.org/drawingml/2006/main">
             <a:off x="6840000" y="1440000"/>
-            <a:ext cx="1800000" cy="720000"/>
+            <a:ext cx="2160000" cy="720000"/>
           </a:xfrm>
           <a:prstGeom xmlns:a="http://schemas.openxmlformats.org/drawingml/2006/main" prst="roundRect">
             <a:avLst/>
@@ -580,7 +581,7 @@
           <a:lstStyle xmlns:a="http://schemas.openxmlformats.org/drawingml/2006/main"/>
           <a:p xmlns:a="http://schemas.openxmlformats.org/drawingml/2006/main">
             <a:r>
-              <a:rPr lang="en-US" sz="1400">
+              <a:rPr lang="en-US" sz="1300">
                 <a:solidFill>
                   <a:srgbClr val="FFFFFF"/>
                 </a:solidFill>
@@ -600,8 +601,8 @@
         </p:nvSpPr>
         <p:spPr>
           <a:xfrm xmlns:a="http://schemas.openxmlformats.org/drawingml/2006/main">
-            <a:off x="360000" y="2700000"/>
-            <a:ext cx="1800000" cy="720000"/>
+            <a:off x="360000" y="2520000"/>
+            <a:ext cx="2160000" cy="720000"/>
           </a:xfrm>
           <a:prstGeom xmlns:a="http://schemas.openxmlformats.org/drawingml/2006/main" prst="roundRect">
             <a:avLst/>
@@ -615,7 +616,7 @@
           <a:lstStyle xmlns:a="http://schemas.openxmlformats.org/drawingml/2006/main"/>
           <a:p xmlns:a="http://schemas.openxmlformats.org/drawingml/2006/main">
             <a:r>
-              <a:rPr lang="en-US" sz="1400">
+              <a:rPr lang="en-US" sz="1300">
                 <a:solidFill>
                   <a:srgbClr val="FFFFFF"/>
                 </a:solidFill>
@@ -635,8 +636,8 @@
         </p:nvSpPr>
         <p:spPr>
           <a:xfrm xmlns:a="http://schemas.openxmlformats.org/drawingml/2006/main">
-            <a:off x="2520000" y="2700000"/>
-            <a:ext cx="1800000" cy="720000"/>
+            <a:off x="2520000" y="2520000"/>
+            <a:ext cx="2160000" cy="720000"/>
           </a:xfrm>
           <a:prstGeom xmlns:a="http://schemas.openxmlformats.org/drawingml/2006/main" prst="roundRect">
             <a:avLst/>
@@ -650,7 +651,7 @@
           <a:lstStyle xmlns:a="http://schemas.openxmlformats.org/drawingml/2006/main"/>
           <a:p xmlns:a="http://schemas.openxmlformats.org/drawingml/2006/main">
             <a:r>
-              <a:rPr lang="en-US" sz="1400">
+              <a:rPr lang="en-US" sz="1300">
                 <a:solidFill>
                   <a:srgbClr val="FFFFFF"/>
                 </a:solidFill>
@@ -670,8 +671,8 @@
         </p:nvSpPr>
         <p:spPr>
           <a:xfrm xmlns:a="http://schemas.openxmlformats.org/drawingml/2006/main">
-            <a:off x="4680000" y="2700000"/>
-            <a:ext cx="1800000" cy="720000"/>
+            <a:off x="4680000" y="2520000"/>
+            <a:ext cx="2160000" cy="720000"/>
           </a:xfrm>
           <a:prstGeom xmlns:a="http://schemas.openxmlformats.org/drawingml/2006/main" prst="roundRect">
             <a:avLst/>
@@ -685,7 +686,7 @@
           <a:lstStyle xmlns:a="http://schemas.openxmlformats.org/drawingml/2006/main"/>
           <a:p xmlns:a="http://schemas.openxmlformats.org/drawingml/2006/main">
             <a:r>
-              <a:rPr lang="en-US" sz="1400">
+              <a:rPr lang="en-US" sz="1300">
                 <a:solidFill>
                   <a:srgbClr val="FFFFFF"/>
                 </a:solidFill>
@@ -705,8 +706,43 @@
         </p:nvSpPr>
         <p:spPr>
           <a:xfrm xmlns:a="http://schemas.openxmlformats.org/drawingml/2006/main">
-            <a:off x="6840000" y="2700000"/>
-            <a:ext cx="1800000" cy="720000"/>
+            <a:off x="6840000" y="2520000"/>
+            <a:ext cx="2160000" cy="720000"/>
+          </a:xfrm>
+          <a:prstGeom xmlns:a="http://schemas.openxmlformats.org/drawingml/2006/main" prst="roundRect">
+            <a:avLst/>
+          </a:prstGeom>
+          <a:solidFill xmlns:a="http://schemas.openxmlformats.org/drawingml/2006/main">
+            <a:srgbClr val="16A085"/>
+          </a:solidFill>
+        </p:spPr>
+        <p:txBody>
+          <a:bodyPr xmlns:a="http://schemas.openxmlformats.org/drawingml/2006/main"/>
+          <a:lstStyle xmlns:a="http://schemas.openxmlformats.org/drawingml/2006/main"/>
+          <a:p xmlns:a="http://schemas.openxmlformats.org/drawingml/2006/main">
+            <a:r>
+              <a:rPr lang="en-US" sz="1300">
+                <a:solidFill>
+                  <a:srgbClr val="FFFFFF"/>
+                </a:solidFill>
+                <a:latin typeface="Consolas"/>
+                <a:ea typeface="Consolas"/>
+              </a:rPr>
+              <a:t>swivel</a:t>
+            </a:r>
+          </a:p>
+        </p:txBody>
+      </p:sp>
+      <p:sp>
+        <p:nvSpPr>
+          <p:cNvPr id="100008" name="TextBox 10"/>
+          <p:cNvSpPr/>
+          <p:nvPr/>
+        </p:nvSpPr>
+        <p:spPr>
+          <a:xfrm xmlns:a="http://schemas.openxmlformats.org/drawingml/2006/main">
+            <a:off x="360000" y="3600000"/>
+            <a:ext cx="2160000" cy="720000"/>
           </a:xfrm>
           <a:prstGeom xmlns:a="http://schemas.openxmlformats.org/drawingml/2006/main" prst="roundRect">
             <a:avLst/>
@@ -720,7 +756,7 @@
           <a:lstStyle xmlns:a="http://schemas.openxmlformats.org/drawingml/2006/main"/>
           <a:p xmlns:a="http://schemas.openxmlformats.org/drawingml/2006/main">
             <a:r>
-              <a:rPr lang="en-US" sz="1400">
+              <a:rPr lang="en-US" sz="1300">
                 <a:solidFill>
                   <a:srgbClr val="FFFFFF"/>
                 </a:solidFill>
@@ -734,14 +770,14 @@
       </p:sp>
       <p:sp>
         <p:nvSpPr>
-          <p:cNvPr id="100008" name="TextBox 10"/>
+          <p:cNvPr id="100009" name="TextBox 11"/>
           <p:cNvSpPr/>
           <p:nvPr/>
         </p:nvSpPr>
         <p:spPr>
           <a:xfrm xmlns:a="http://schemas.openxmlformats.org/drawingml/2006/main">
-            <a:off x="360000" y="3960000"/>
-            <a:ext cx="1800000" cy="720000"/>
+            <a:off x="2520000" y="3600000"/>
+            <a:ext cx="2160000" cy="720000"/>
           </a:xfrm>
           <a:prstGeom xmlns:a="http://schemas.openxmlformats.org/drawingml/2006/main" prst="roundRect">
             <a:avLst/>
@@ -755,7 +791,7 @@
           <a:lstStyle xmlns:a="http://schemas.openxmlformats.org/drawingml/2006/main"/>
           <a:p xmlns:a="http://schemas.openxmlformats.org/drawingml/2006/main">
             <a:r>
-              <a:rPr lang="en-US" sz="1400">
+              <a:rPr lang="en-US" sz="1300">
                 <a:solidFill>
                   <a:srgbClr val="FFFFFF"/>
                 </a:solidFill>
@@ -769,20 +805,20 @@
       </p:sp>
       <p:sp>
         <p:nvSpPr>
-          <p:cNvPr id="100009" name="TextBox 11"/>
+          <p:cNvPr id="100010" name="TextBox 12"/>
           <p:cNvSpPr/>
           <p:nvPr/>
         </p:nvSpPr>
         <p:spPr>
           <a:xfrm xmlns:a="http://schemas.openxmlformats.org/drawingml/2006/main">
-            <a:off x="2520000" y="3960000"/>
-            <a:ext cx="1800000" cy="720000"/>
+            <a:off x="4680000" y="3600000"/>
+            <a:ext cx="2160000" cy="720000"/>
           </a:xfrm>
           <a:prstGeom xmlns:a="http://schemas.openxmlformats.org/drawingml/2006/main" prst="roundRect">
             <a:avLst/>
           </a:prstGeom>
           <a:solidFill xmlns:a="http://schemas.openxmlformats.org/drawingml/2006/main">
-            <a:srgbClr val="16A085"/>
+            <a:srgbClr val="7D3C98"/>
           </a:solidFill>
         </p:spPr>
         <p:txBody>
@@ -790,28 +826,28 @@
           <a:lstStyle xmlns:a="http://schemas.openxmlformats.org/drawingml/2006/main"/>
           <a:p xmlns:a="http://schemas.openxmlformats.org/drawingml/2006/main">
             <a:r>
-              <a:rPr lang="en-US" sz="1400">
+              <a:rPr lang="en-US" sz="1300">
                 <a:solidFill>
                   <a:srgbClr val="FFFFFF"/>
                 </a:solidFill>
                 <a:latin typeface="Consolas"/>
                 <a:ea typeface="Consolas"/>
               </a:rPr>
-              <a:t>swivel</a:t>
-            </a:r>
-          </a:p>
-        </p:txBody>
-      </p:sp>
-      <p:sp>
-        <p:nvSpPr>
-          <p:cNvPr id="100010" name="TextBox 12"/>
+              <a:t>box</a:t>
+            </a:r>
+          </a:p>
+        </p:txBody>
+      </p:sp>
+      <p:sp>
+        <p:nvSpPr>
+          <p:cNvPr id="100011" name="TextBox 13"/>
           <p:cNvSpPr/>
           <p:nvPr/>
         </p:nvSpPr>
         <p:spPr>
           <a:xfrm xmlns:a="http://schemas.openxmlformats.org/drawingml/2006/main">
-            <a:off x="4680000" y="3960000"/>
-            <a:ext cx="1800000" cy="720000"/>
+            <a:off x="6840000" y="3600000"/>
+            <a:ext cx="2160000" cy="720000"/>
           </a:xfrm>
           <a:prstGeom xmlns:a="http://schemas.openxmlformats.org/drawingml/2006/main" prst="roundRect">
             <a:avLst/>
@@ -825,49 +861,14 @@
           <a:lstStyle xmlns:a="http://schemas.openxmlformats.org/drawingml/2006/main"/>
           <a:p xmlns:a="http://schemas.openxmlformats.org/drawingml/2006/main">
             <a:r>
-              <a:rPr lang="en-US" sz="1200">
+              <a:rPr lang="en-US" sz="1300">
                 <a:solidFill>
                   <a:srgbClr val="FFFFFF"/>
                 </a:solidFill>
                 <a:latin typeface="Consolas"/>
                 <a:ea typeface="Consolas"/>
               </a:rPr>
-              <a:t>checkerboard</a:t>
-            </a:r>
-          </a:p>
-        </p:txBody>
-      </p:sp>
-      <p:sp>
-        <p:nvSpPr>
-          <p:cNvPr id="100011" name="TextBox 13"/>
-          <p:cNvSpPr/>
-          <p:nvPr/>
-        </p:nvSpPr>
-        <p:spPr>
-          <a:xfrm xmlns:a="http://schemas.openxmlformats.org/drawingml/2006/main">
-            <a:off x="6840000" y="3960000"/>
-            <a:ext cx="1800000" cy="720000"/>
-          </a:xfrm>
-          <a:prstGeom xmlns:a="http://schemas.openxmlformats.org/drawingml/2006/main" prst="roundRect">
-            <a:avLst/>
-          </a:prstGeom>
-          <a:solidFill xmlns:a="http://schemas.openxmlformats.org/drawingml/2006/main">
-            <a:srgbClr val="7D3C98"/>
-          </a:solidFill>
-        </p:spPr>
-        <p:txBody>
-          <a:bodyPr xmlns:a="http://schemas.openxmlformats.org/drawingml/2006/main"/>
-          <a:lstStyle xmlns:a="http://schemas.openxmlformats.org/drawingml/2006/main"/>
-          <a:p xmlns:a="http://schemas.openxmlformats.org/drawingml/2006/main">
-            <a:r>
-              <a:rPr lang="en-US" sz="1400">
-                <a:solidFill>
-                  <a:srgbClr val="FFFFFF"/>
-                </a:solidFill>
-                <a:latin typeface="Consolas"/>
-                <a:ea typeface="Consolas"/>
-              </a:rPr>
-              <a:t>blinds</a:t>
+              <a:t>circle</a:t>
             </a:r>
           </a:p>
         </p:txBody>
@@ -898,7 +899,7 @@
                             </p:stCondLst>
                             <p:childTnLst>
                               <p:par>
-                                <p:cTn id="3" presetID="1" presetClass="entr" presetSubtype="0" dur="500" fill="hold" grpId="0" nodeType="clickEffect">
+                                <p:cTn id="3" presetID="1" presetClass="entr" presetSubtype="0" dur="400" fill="hold" grpId="0" nodeType="clickEffect">
                                   <p:stCondLst>
                                     <p:cond delay="0"/>
                                   </p:stCondLst>
@@ -933,7 +934,7 @@
                   <p:par>
                     <p:cTn id="14" fill="hold">
                       <p:stCondLst>
-                        <p:cond delay="0"/>
+                        <p:cond delay="indefinite"/>
                       </p:stCondLst>
                       <p:childTnLst>
                         <p:par>
@@ -943,7 +944,7 @@
                             </p:stCondLst>
                             <p:childTnLst>
                               <p:par>
-                                <p:cTn id="9" presetID="10" presetClass="entr" presetSubtype="0" fill="hold" grpId="1" nodeType="afterEffect">
+                                <p:cTn id="9" presetID="10" presetClass="entr" presetSubtype="0" fill="hold" grpId="1" nodeType="clickEffect">
                                   <p:stCondLst>
                                     <p:cond delay="0"/>
                                   </p:stCondLst>
@@ -986,7 +987,7 @@
                   <p:par>
                     <p:cTn id="21" fill="hold">
                       <p:stCondLst>
-                        <p:cond delay="0"/>
+                        <p:cond delay="indefinite"/>
                       </p:stCondLst>
                       <p:childTnLst>
                         <p:par>
@@ -996,7 +997,7 @@
                             </p:stCondLst>
                             <p:childTnLst>
                               <p:par>
-                                <p:cTn id="15" presetID="2" presetClass="entr" presetSubtype="4" fill="hold" grpId="2" nodeType="afterEffect">
+                                <p:cTn id="15" presetID="2" presetClass="entr" presetSubtype="4" fill="hold" grpId="2" nodeType="clickEffect">
                                   <p:stCondLst>
                                     <p:cond delay="0"/>
                                   </p:stCondLst>
@@ -1054,7 +1055,7 @@
                   <p:par>
                     <p:cTn id="27" fill="hold">
                       <p:stCondLst>
-                        <p:cond delay="0"/>
+                        <p:cond delay="indefinite"/>
                       </p:stCondLst>
                       <p:childTnLst>
                         <p:par>
@@ -1064,7 +1065,7 @@
                             </p:stCondLst>
                             <p:childTnLst>
                               <p:par>
-                                <p:cTn id="22" presetID="21" presetClass="entr" presetSubtype="0" fill="hold" grpId="3" nodeType="afterEffect">
+                                <p:cTn id="22" presetID="21" presetClass="entr" presetSubtype="0" fill="hold" grpId="3" nodeType="clickEffect">
                                   <p:stCondLst>
                                     <p:cond delay="0"/>
                                   </p:stCondLst>
@@ -1109,7 +1110,7 @@
                   <p:par>
                     <p:cTn id="33" fill="hold">
                       <p:stCondLst>
-                        <p:cond delay="0"/>
+                        <p:cond delay="indefinite"/>
                       </p:stCondLst>
                       <p:childTnLst>
                         <p:par>
@@ -1119,7 +1120,7 @@
                             </p:stCondLst>
                             <p:childTnLst>
                               <p:par>
-                                <p:cTn id="28" presetID="20" presetClass="entr" presetSubtype="1" fill="hold" grpId="4" nodeType="afterEffect">
+                                <p:cTn id="28" presetID="20" presetClass="entr" presetSubtype="1" fill="hold" grpId="4" nodeType="clickEffect">
                                   <p:stCondLst>
                                     <p:cond delay="0"/>
                                   </p:stCondLst>
@@ -1162,7 +1163,7 @@
                   <p:par>
                     <p:cTn id="39" fill="hold">
                       <p:stCondLst>
-                        <p:cond delay="0"/>
+                        <p:cond delay="indefinite"/>
                       </p:stCondLst>
                       <p:childTnLst>
                         <p:par>
@@ -1172,7 +1173,7 @@
                             </p:stCondLst>
                             <p:childTnLst>
                               <p:par>
-                                <p:cTn id="34" presetID="24" presetClass="entr" presetSubtype="0" dur="800" fill="hold" grpId="5" nodeType="afterEffect">
+                                <p:cTn id="34" presetID="24" presetClass="entr" presetSubtype="0" dur="800" fill="hold" grpId="5" nodeType="clickEffect">
                                   <p:stCondLst>
                                     <p:cond delay="0"/>
                                   </p:stCondLst>
@@ -1207,7 +1208,7 @@
                   <p:par>
                     <p:cTn id="46" fill="hold">
                       <p:stCondLst>
-                        <p:cond delay="0"/>
+                        <p:cond delay="indefinite"/>
                       </p:stCondLst>
                       <p:childTnLst>
                         <p:par>
@@ -1217,7 +1218,7 @@
                             </p:stCondLst>
                             <p:childTnLst>
                               <p:par>
-                                <p:cTn id="40" presetID="12" presetClass="entr" presetSubtype="0" fill="hold" grpId="6" nodeType="afterEffect">
+                                <p:cTn id="40" presetID="12" presetClass="entr" presetSubtype="0" fill="hold" grpId="6" nodeType="clickEffect">
                                   <p:stCondLst>
                                     <p:cond delay="0"/>
                                   </p:stCondLst>
@@ -1273,19 +1274,19 @@
                     </p:cTn>
                   </p:par>
                   <p:par>
-                    <p:cTn id="52" fill="hold">
+                    <p:cTn id="53" fill="hold">
                       <p:stCondLst>
-                        <p:cond delay="0"/>
+                        <p:cond delay="indefinite"/>
                       </p:stCondLst>
                       <p:childTnLst>
                         <p:par>
-                          <p:cTn id="51" fill="hold">
+                          <p:cTn id="52" fill="hold">
                             <p:stCondLst>
                               <p:cond delay="0"/>
                             </p:stCondLst>
                             <p:childTnLst>
                               <p:par>
-                                <p:cTn id="47" presetID="15" presetClass="entr" presetSubtype="10" fill="hold" grpId="7" nodeType="afterEffect">
+                                <p:cTn id="47" presetID="17" presetClass="entr" presetSubtype="0" fill="hold" grpId="7" nodeType="clickEffect">
                                   <p:stCondLst>
                                     <p:cond delay="0"/>
                                   </p:stCondLst>
@@ -1308,9 +1309,17 @@
                                         <p:strVal val="visible"/>
                                       </p:to>
                                     </p:set>
-                                    <p:animEffect transition="in" filter="barn(inHorizontal)">
-                                      <p:cBhvr>
-                                        <p:cTn id="49" dur="600"/>
+                                    <p:animRot by="21600000">
+                                      <p:cBhvr>
+                                        <p:cTn id="49" dur="700" fill="hold"/>
+                                        <p:tgtEl>
+                                          <p:spTgt spid="100007"/>
+                                        </p:tgtEl>
+                                      </p:cBhvr>
+                                    </p:animRot>
+                                    <p:animEffect transition="in" filter="fade">
+                                      <p:cBhvr>
+                                        <p:cTn id="51" dur="700"/>
                                         <p:tgtEl>
                                           <p:spTgt spid="100007"/>
                                         </p:tgtEl>
@@ -1326,26 +1335,26 @@
                     </p:cTn>
                   </p:par>
                   <p:par>
-                    <p:cTn id="58" fill="hold">
+                    <p:cTn id="59" fill="hold">
                       <p:stCondLst>
-                        <p:cond delay="0"/>
+                        <p:cond delay="indefinite"/>
                       </p:stCondLst>
                       <p:childTnLst>
                         <p:par>
-                          <p:cTn id="57" fill="hold">
+                          <p:cTn id="58" fill="hold">
                             <p:stCondLst>
                               <p:cond delay="0"/>
                             </p:stCondLst>
                             <p:childTnLst>
                               <p:par>
-                                <p:cTn id="53" presetID="19" presetClass="entr" presetSubtype="1" fill="hold" grpId="8" nodeType="afterEffect">
+                                <p:cTn id="54" presetID="15" presetClass="entr" presetSubtype="10" fill="hold" grpId="8" nodeType="clickEffect">
                                   <p:stCondLst>
                                     <p:cond delay="0"/>
                                   </p:stCondLst>
                                   <p:childTnLst>
                                     <p:set>
                                       <p:cBhvr>
-                                        <p:cTn id="54" dur="1" fill="hold">
+                                        <p:cTn id="55" dur="1" fill="hold">
                                           <p:stCondLst>
                                             <p:cond delay="0"/>
                                           </p:stCondLst>
@@ -1361,9 +1370,9 @@
                                         <p:strVal val="visible"/>
                                       </p:to>
                                     </p:set>
-                                    <p:animEffect transition="in" filter="wheel(1)">
-                                      <p:cBhvr>
-                                        <p:cTn id="55" dur="800"/>
+                                    <p:animEffect transition="in" filter="barn(inHorizontal)">
+                                      <p:cBhvr>
+                                        <p:cTn id="56" dur="600"/>
                                         <p:tgtEl>
                                           <p:spTgt spid="100008"/>
                                         </p:tgtEl>
@@ -1381,7 +1390,7 @@
                   <p:par>
                     <p:cTn id="65" fill="hold">
                       <p:stCondLst>
-                        <p:cond delay="0"/>
+                        <p:cond delay="indefinite"/>
                       </p:stCondLst>
                       <p:childTnLst>
                         <p:par>
@@ -1391,14 +1400,14 @@
                             </p:stCondLst>
                             <p:childTnLst>
                               <p:par>
-                                <p:cTn id="59" presetID="17" presetClass="entr" presetSubtype="0" fill="hold" grpId="9" nodeType="afterEffect">
+                                <p:cTn id="60" presetID="19" presetClass="entr" presetSubtype="1" fill="hold" grpId="9" nodeType="clickEffect">
                                   <p:stCondLst>
                                     <p:cond delay="0"/>
                                   </p:stCondLst>
                                   <p:childTnLst>
                                     <p:set>
                                       <p:cBhvr>
-                                        <p:cTn id="60" dur="1" fill="hold">
+                                        <p:cTn id="61" dur="1" fill="hold">
                                           <p:stCondLst>
                                             <p:cond delay="0"/>
                                           </p:stCondLst>
@@ -1414,17 +1423,9 @@
                                         <p:strVal val="visible"/>
                                       </p:to>
                                     </p:set>
-                                    <p:animRot by="21600000">
-                                      <p:cBhvr>
-                                        <p:cTn id="61" dur="700" fill="hold"/>
-                                        <p:tgtEl>
-                                          <p:spTgt spid="100009"/>
-                                        </p:tgtEl>
-                                      </p:cBhvr>
-                                    </p:animRot>
-                                    <p:animEffect transition="in" filter="fade">
-                                      <p:cBhvr>
-                                        <p:cTn id="63" dur="700"/>
+                                    <p:animEffect transition="in" filter="wheel(1)">
+                                      <p:cBhvr>
+                                        <p:cTn id="62" dur="800"/>
                                         <p:tgtEl>
                                           <p:spTgt spid="100009"/>
                                         </p:tgtEl>
@@ -1442,7 +1443,7 @@
                   <p:par>
                     <p:cTn id="71" fill="hold">
                       <p:stCondLst>
-                        <p:cond delay="0"/>
+                        <p:cond delay="indefinite"/>
                       </p:stCondLst>
                       <p:childTnLst>
                         <p:par>
@@ -1452,7 +1453,7 @@
                             </p:stCondLst>
                             <p:childTnLst>
                               <p:par>
-                                <p:cTn id="66" presetID="5" presetClass="entr" presetSubtype="5" fill="hold" grpId="10" nodeType="afterEffect">
+                                <p:cTn id="66" presetID="4" presetClass="entr" presetSubtype="0" fill="hold" grpId="10" nodeType="clickEffect">
                                   <p:stCondLst>
                                     <p:cond delay="0"/>
                                   </p:stCondLst>
@@ -1475,7 +1476,7 @@
                                         <p:strVal val="visible"/>
                                       </p:to>
                                     </p:set>
-                                    <p:animEffect transition="in" filter="checkerboard(across)">
+                                    <p:animEffect transition="in" filter="box">
                                       <p:cBhvr>
                                         <p:cTn id="68" dur="600"/>
                                         <p:tgtEl>
@@ -1495,7 +1496,7 @@
                   <p:par>
                     <p:cTn id="77" fill="hold">
                       <p:stCondLst>
-                        <p:cond delay="0"/>
+                        <p:cond delay="indefinite"/>
                       </p:stCondLst>
                       <p:childTnLst>
                         <p:par>
@@ -1505,7 +1506,7 @@
                             </p:stCondLst>
                             <p:childTnLst>
                               <p:par>
-                                <p:cTn id="72" presetID="3" presetClass="entr" presetSubtype="10" fill="hold" grpId="11" nodeType="afterEffect">
+                                <p:cTn id="72" presetID="6" presetClass="entr" presetSubtype="0" fill="hold" grpId="11" nodeType="clickEffect">
                                   <p:stCondLst>
                                     <p:cond delay="0"/>
                                   </p:stCondLst>
@@ -1528,7 +1529,7 @@
                                         <p:strVal val="visible"/>
                                       </p:to>
                                     </p:set>
-                                    <p:animEffect transition="in" filter="blinds(horizontal)">
+                                    <p:animEffect transition="in" filter="circle">
                                       <p:cBhvr>
                                         <p:cTn id="74" dur="600"/>
                                         <p:tgtEl>
@@ -1639,7 +1640,7 @@
         <p:spPr>
           <a:xfrm xmlns:a="http://schemas.openxmlformats.org/drawingml/2006/main">
             <a:off x="360000" y="1440000"/>
-            <a:ext cx="2520000" cy="900000"/>
+            <a:ext cx="2160000" cy="720000"/>
           </a:xfrm>
           <a:prstGeom xmlns:a="http://schemas.openxmlformats.org/drawingml/2006/main" prst="roundRect">
             <a:avLst/>
@@ -1653,7 +1654,7 @@
           <a:lstStyle xmlns:a="http://schemas.openxmlformats.org/drawingml/2006/main"/>
           <a:p xmlns:a="http://schemas.openxmlformats.org/drawingml/2006/main">
             <a:r>
-              <a:rPr lang="en-US" sz="1400">
+              <a:rPr lang="en-US" sz="1300">
                 <a:solidFill>
                   <a:srgbClr val="FFFFFF"/>
                 </a:solidFill>
@@ -1673,8 +1674,8 @@
         </p:nvSpPr>
         <p:spPr>
           <a:xfrm xmlns:a="http://schemas.openxmlformats.org/drawingml/2006/main">
-            <a:off x="3240000" y="1440000"/>
-            <a:ext cx="2520000" cy="900000"/>
+            <a:off x="2520000" y="1440000"/>
+            <a:ext cx="2160000" cy="720000"/>
           </a:xfrm>
           <a:prstGeom xmlns:a="http://schemas.openxmlformats.org/drawingml/2006/main" prst="roundRect">
             <a:avLst/>
@@ -1688,14 +1689,14 @@
           <a:lstStyle xmlns:a="http://schemas.openxmlformats.org/drawingml/2006/main"/>
           <a:p xmlns:a="http://schemas.openxmlformats.org/drawingml/2006/main">
             <a:r>
-              <a:rPr lang="en-US" sz="1400">
+              <a:rPr lang="en-US" sz="1300">
                 <a:solidFill>
                   <a:srgbClr val="FFFFFF"/>
                 </a:solidFill>
                 <a:latin typeface="Consolas"/>
                 <a:ea typeface="Consolas"/>
               </a:rPr>
-              <a:t>fly out</a:t>
+              <a:t>fly down</a:t>
             </a:r>
           </a:p>
         </p:txBody>
@@ -1708,8 +1709,43 @@
         </p:nvSpPr>
         <p:spPr>
           <a:xfrm xmlns:a="http://schemas.openxmlformats.org/drawingml/2006/main">
-            <a:off x="6120000" y="1440000"/>
-            <a:ext cx="2520000" cy="900000"/>
+            <a:off x="4680000" y="1440000"/>
+            <a:ext cx="2160000" cy="720000"/>
+          </a:xfrm>
+          <a:prstGeom xmlns:a="http://schemas.openxmlformats.org/drawingml/2006/main" prst="roundRect">
+            <a:avLst/>
+          </a:prstGeom>
+          <a:solidFill xmlns:a="http://schemas.openxmlformats.org/drawingml/2006/main">
+            <a:srgbClr val="2980B9"/>
+          </a:solidFill>
+        </p:spPr>
+        <p:txBody>
+          <a:bodyPr xmlns:a="http://schemas.openxmlformats.org/drawingml/2006/main"/>
+          <a:lstStyle xmlns:a="http://schemas.openxmlformats.org/drawingml/2006/main"/>
+          <a:p xmlns:a="http://schemas.openxmlformats.org/drawingml/2006/main">
+            <a:r>
+              <a:rPr lang="en-US" sz="1300">
+                <a:solidFill>
+                  <a:srgbClr val="FFFFFF"/>
+                </a:solidFill>
+                <a:latin typeface="Consolas"/>
+                <a:ea typeface="Consolas"/>
+              </a:rPr>
+              <a:t>fly up</a:t>
+            </a:r>
+          </a:p>
+        </p:txBody>
+      </p:sp>
+      <p:sp>
+        <p:nvSpPr>
+          <p:cNvPr id="100015" name="TextBox 5"/>
+          <p:cNvSpPr/>
+          <p:nvPr/>
+        </p:nvSpPr>
+        <p:spPr>
+          <a:xfrm xmlns:a="http://schemas.openxmlformats.org/drawingml/2006/main">
+            <a:off x="6840000" y="1440000"/>
+            <a:ext cx="2160000" cy="720000"/>
           </a:xfrm>
           <a:prstGeom xmlns:a="http://schemas.openxmlformats.org/drawingml/2006/main" prst="roundRect">
             <a:avLst/>
@@ -1723,7 +1759,7 @@
           <a:lstStyle xmlns:a="http://schemas.openxmlformats.org/drawingml/2006/main"/>
           <a:p xmlns:a="http://schemas.openxmlformats.org/drawingml/2006/main">
             <a:r>
-              <a:rPr lang="en-US" sz="1400">
+              <a:rPr lang="en-US" sz="1300">
                 <a:solidFill>
                   <a:srgbClr val="FFFFFF"/>
                 </a:solidFill>
@@ -1737,14 +1773,84 @@
       </p:sp>
       <p:sp>
         <p:nvSpPr>
-          <p:cNvPr id="100015" name="TextBox 5"/>
+          <p:cNvPr id="100016" name="TextBox 6"/>
           <p:cNvSpPr/>
           <p:nvPr/>
         </p:nvSpPr>
         <p:spPr>
           <a:xfrm xmlns:a="http://schemas.openxmlformats.org/drawingml/2006/main">
-            <a:off x="360000" y="2880000"/>
-            <a:ext cx="2520000" cy="900000"/>
+            <a:off x="360000" y="2520000"/>
+            <a:ext cx="2160000" cy="720000"/>
+          </a:xfrm>
+          <a:prstGeom xmlns:a="http://schemas.openxmlformats.org/drawingml/2006/main" prst="roundRect">
+            <a:avLst/>
+          </a:prstGeom>
+          <a:solidFill xmlns:a="http://schemas.openxmlformats.org/drawingml/2006/main">
+            <a:srgbClr val="F39C12"/>
+          </a:solidFill>
+        </p:spPr>
+        <p:txBody>
+          <a:bodyPr xmlns:a="http://schemas.openxmlformats.org/drawingml/2006/main"/>
+          <a:lstStyle xmlns:a="http://schemas.openxmlformats.org/drawingml/2006/main"/>
+          <a:p xmlns:a="http://schemas.openxmlformats.org/drawingml/2006/main">
+            <a:r>
+              <a:rPr lang="en-US" sz="1300">
+                <a:solidFill>
+                  <a:srgbClr val="FFFFFF"/>
+                </a:solidFill>
+                <a:latin typeface="Consolas"/>
+                <a:ea typeface="Consolas"/>
+              </a:rPr>
+              <a:t>wipe left</a:t>
+            </a:r>
+          </a:p>
+        </p:txBody>
+      </p:sp>
+      <p:sp>
+        <p:nvSpPr>
+          <p:cNvPr id="100017" name="TextBox 7"/>
+          <p:cNvSpPr/>
+          <p:nvPr/>
+        </p:nvSpPr>
+        <p:spPr>
+          <a:xfrm xmlns:a="http://schemas.openxmlformats.org/drawingml/2006/main">
+            <a:off x="2520000" y="2520000"/>
+            <a:ext cx="2160000" cy="720000"/>
+          </a:xfrm>
+          <a:prstGeom xmlns:a="http://schemas.openxmlformats.org/drawingml/2006/main" prst="roundRect">
+            <a:avLst/>
+          </a:prstGeom>
+          <a:solidFill xmlns:a="http://schemas.openxmlformats.org/drawingml/2006/main">
+            <a:srgbClr val="D35400"/>
+          </a:solidFill>
+        </p:spPr>
+        <p:txBody>
+          <a:bodyPr xmlns:a="http://schemas.openxmlformats.org/drawingml/2006/main"/>
+          <a:lstStyle xmlns:a="http://schemas.openxmlformats.org/drawingml/2006/main"/>
+          <a:p xmlns:a="http://schemas.openxmlformats.org/drawingml/2006/main">
+            <a:r>
+              <a:rPr lang="en-US" sz="1300">
+                <a:solidFill>
+                  <a:srgbClr val="FFFFFF"/>
+                </a:solidFill>
+                <a:latin typeface="Consolas"/>
+                <a:ea typeface="Consolas"/>
+              </a:rPr>
+              <a:t>wipe right</a:t>
+            </a:r>
+          </a:p>
+        </p:txBody>
+      </p:sp>
+      <p:sp>
+        <p:nvSpPr>
+          <p:cNvPr id="100018" name="TextBox 8"/>
+          <p:cNvSpPr/>
+          <p:nvPr/>
+        </p:nvSpPr>
+        <p:spPr>
+          <a:xfrm xmlns:a="http://schemas.openxmlformats.org/drawingml/2006/main">
+            <a:off x="4680000" y="2520000"/>
+            <a:ext cx="2160000" cy="720000"/>
           </a:xfrm>
           <a:prstGeom xmlns:a="http://schemas.openxmlformats.org/drawingml/2006/main" prst="roundRect">
             <a:avLst/>
@@ -1758,63 +1864,28 @@
           <a:lstStyle xmlns:a="http://schemas.openxmlformats.org/drawingml/2006/main"/>
           <a:p xmlns:a="http://schemas.openxmlformats.org/drawingml/2006/main">
             <a:r>
-              <a:rPr lang="en-US" sz="1400">
+              <a:rPr lang="en-US" sz="1300">
                 <a:solidFill>
                   <a:srgbClr val="FFFFFF"/>
                 </a:solidFill>
                 <a:latin typeface="Consolas"/>
                 <a:ea typeface="Consolas"/>
               </a:rPr>
-              <a:t>dissolve out</a:t>
-            </a:r>
-          </a:p>
-        </p:txBody>
-      </p:sp>
-      <p:sp>
-        <p:nvSpPr>
-          <p:cNvPr id="100016" name="TextBox 6"/>
+              <a:t>dissolve</a:t>
+            </a:r>
+          </a:p>
+        </p:txBody>
+      </p:sp>
+      <p:sp>
+        <p:nvSpPr>
+          <p:cNvPr id="100019" name="TextBox 9"/>
           <p:cNvSpPr/>
           <p:nvPr/>
         </p:nvSpPr>
         <p:spPr>
           <a:xfrm xmlns:a="http://schemas.openxmlformats.org/drawingml/2006/main">
-            <a:off x="3240000" y="2880000"/>
-            <a:ext cx="2520000" cy="900000"/>
-          </a:xfrm>
-          <a:prstGeom xmlns:a="http://schemas.openxmlformats.org/drawingml/2006/main" prst="roundRect">
-            <a:avLst/>
-          </a:prstGeom>
-          <a:solidFill xmlns:a="http://schemas.openxmlformats.org/drawingml/2006/main">
-            <a:srgbClr val="F39C12"/>
-          </a:solidFill>
-        </p:spPr>
-        <p:txBody>
-          <a:bodyPr xmlns:a="http://schemas.openxmlformats.org/drawingml/2006/main"/>
-          <a:lstStyle xmlns:a="http://schemas.openxmlformats.org/drawingml/2006/main"/>
-          <a:p xmlns:a="http://schemas.openxmlformats.org/drawingml/2006/main">
-            <a:r>
-              <a:rPr lang="en-US" sz="1400">
-                <a:solidFill>
-                  <a:srgbClr val="FFFFFF"/>
-                </a:solidFill>
-                <a:latin typeface="Consolas"/>
-                <a:ea typeface="Consolas"/>
-              </a:rPr>
-              <a:t>wipe out</a:t>
-            </a:r>
-          </a:p>
-        </p:txBody>
-      </p:sp>
-      <p:sp>
-        <p:nvSpPr>
-          <p:cNvPr id="100017" name="TextBox 7"/>
-          <p:cNvSpPr/>
-          <p:nvPr/>
-        </p:nvSpPr>
-        <p:spPr>
-          <a:xfrm xmlns:a="http://schemas.openxmlformats.org/drawingml/2006/main">
-            <a:off x="6120000" y="2880000"/>
-            <a:ext cx="2520000" cy="900000"/>
+            <a:off x="6840000" y="2520000"/>
+            <a:ext cx="2160000" cy="720000"/>
           </a:xfrm>
           <a:prstGeom xmlns:a="http://schemas.openxmlformats.org/drawingml/2006/main" prst="roundRect">
             <a:avLst/>
@@ -1828,14 +1899,84 @@
           <a:lstStyle xmlns:a="http://schemas.openxmlformats.org/drawingml/2006/main"/>
           <a:p xmlns:a="http://schemas.openxmlformats.org/drawingml/2006/main">
             <a:r>
-              <a:rPr lang="en-US" sz="1400">
+              <a:rPr lang="en-US" sz="1300">
                 <a:solidFill>
                   <a:srgbClr val="FFFFFF"/>
                 </a:solidFill>
                 <a:latin typeface="Consolas"/>
                 <a:ea typeface="Consolas"/>
               </a:rPr>
-              <a:t>flash out</a:t>
+              <a:t>split</a:t>
+            </a:r>
+          </a:p>
+        </p:txBody>
+      </p:sp>
+      <p:sp>
+        <p:nvSpPr>
+          <p:cNvPr id="100020" name="TextBox 10"/>
+          <p:cNvSpPr/>
+          <p:nvPr/>
+        </p:nvSpPr>
+        <p:spPr>
+          <a:xfrm xmlns:a="http://schemas.openxmlformats.org/drawingml/2006/main">
+            <a:off x="360000" y="3600000"/>
+            <a:ext cx="2160000" cy="720000"/>
+          </a:xfrm>
+          <a:prstGeom xmlns:a="http://schemas.openxmlformats.org/drawingml/2006/main" prst="roundRect">
+            <a:avLst/>
+          </a:prstGeom>
+          <a:solidFill xmlns:a="http://schemas.openxmlformats.org/drawingml/2006/main">
+            <a:srgbClr val="C0392B"/>
+          </a:solidFill>
+        </p:spPr>
+        <p:txBody>
+          <a:bodyPr xmlns:a="http://schemas.openxmlformats.org/drawingml/2006/main"/>
+          <a:lstStyle xmlns:a="http://schemas.openxmlformats.org/drawingml/2006/main"/>
+          <a:p xmlns:a="http://schemas.openxmlformats.org/drawingml/2006/main">
+            <a:r>
+              <a:rPr lang="en-US" sz="1300">
+                <a:solidFill>
+                  <a:srgbClr val="FFFFFF"/>
+                </a:solidFill>
+                <a:latin typeface="Consolas"/>
+                <a:ea typeface="Consolas"/>
+              </a:rPr>
+              <a:t>wheel</a:t>
+            </a:r>
+          </a:p>
+        </p:txBody>
+      </p:sp>
+      <p:sp>
+        <p:nvSpPr>
+          <p:cNvPr id="100021" name="TextBox 11"/>
+          <p:cNvSpPr/>
+          <p:nvPr/>
+        </p:nvSpPr>
+        <p:spPr>
+          <a:xfrm xmlns:a="http://schemas.openxmlformats.org/drawingml/2006/main">
+            <a:off x="2520000" y="3600000"/>
+            <a:ext cx="2160000" cy="720000"/>
+          </a:xfrm>
+          <a:prstGeom xmlns:a="http://schemas.openxmlformats.org/drawingml/2006/main" prst="roundRect">
+            <a:avLst/>
+          </a:prstGeom>
+          <a:solidFill xmlns:a="http://schemas.openxmlformats.org/drawingml/2006/main">
+            <a:srgbClr val="16A085"/>
+          </a:solidFill>
+        </p:spPr>
+        <p:txBody>
+          <a:bodyPr xmlns:a="http://schemas.openxmlformats.org/drawingml/2006/main"/>
+          <a:lstStyle xmlns:a="http://schemas.openxmlformats.org/drawingml/2006/main"/>
+          <a:p xmlns:a="http://schemas.openxmlformats.org/drawingml/2006/main">
+            <a:r>
+              <a:rPr lang="en-US" sz="1300">
+                <a:solidFill>
+                  <a:srgbClr val="FFFFFF"/>
+                </a:solidFill>
+                <a:latin typeface="Consolas"/>
+                <a:ea typeface="Consolas"/>
+              </a:rPr>
+              <a:t>flash</a:t>
             </a:r>
           </a:p>
         </p:txBody>
@@ -1909,7 +2050,7 @@
                   <p:par>
                     <p:cTn id="15" fill="hold">
                       <p:stCondLst>
-                        <p:cond delay="0"/>
+                        <p:cond delay="indefinite"/>
                       </p:stCondLst>
                       <p:childTnLst>
                         <p:par>
@@ -1919,7 +2060,7 @@
                             </p:stCondLst>
                             <p:childTnLst>
                               <p:par>
-                                <p:cTn id="9" presetID="2" presetClass="exit" presetSubtype="4" fill="hold" grpId="1" nodeType="afterEffect">
+                                <p:cTn id="9" presetID="2" presetClass="exit" presetSubtype="4" fill="hold" grpId="1" nodeType="clickEffect">
                                   <p:stCondLst>
                                     <p:cond delay="0"/>
                                   </p:stCondLst>
@@ -1975,19 +2116,19 @@
                     </p:cTn>
                   </p:par>
                   <p:par>
-                    <p:cTn id="21" fill="hold">
+                    <p:cTn id="22" fill="hold">
                       <p:stCondLst>
-                        <p:cond delay="0"/>
+                        <p:cond delay="indefinite"/>
                       </p:stCondLst>
                       <p:childTnLst>
                         <p:par>
-                          <p:cTn id="20" fill="hold">
+                          <p:cTn id="21" fill="hold">
                             <p:stCondLst>
                               <p:cond delay="0"/>
                             </p:stCondLst>
                             <p:childTnLst>
                               <p:par>
-                                <p:cTn id="16" presetID="21" presetClass="exit" presetSubtype="0" fill="hold" grpId="2" nodeType="afterEffect">
+                                <p:cTn id="16" presetID="2" presetClass="exit" presetSubtype="1" fill="hold" grpId="2" nodeType="clickEffect">
                                   <p:stCondLst>
                                     <p:cond delay="0"/>
                                   </p:stCondLst>
@@ -2010,11 +2151,79 @@
                                         <p:strVal val="hidden"/>
                                       </p:to>
                                     </p:set>
+                                    <p:anim calcmode="lin" valueType="num">
+                                      <p:cBhvr additive="base">
+                                        <p:cTn id="20" dur="600" fill="hold"/>
+                                        <p:tgtEl>
+                                          <p:spTgt spid="100014"/>
+                                        </p:tgtEl>
+                                        <p:attrNameLst>
+                                          <p:attrName>ppt_y</p:attrName>
+                                        </p:attrNameLst>
+                                      </p:cBhvr>
+                                      <p:tavLst>
+                                        <p:tav tm="0">
+                                          <p:val>
+                                            <p:strVal val="#ppt_y"/>
+                                          </p:val>
+                                        </p:tav>
+                                        <p:tav tm="100000">
+                                          <p:val>
+                                            <p:strVal val="0-#ppt_h/2"/>
+                                          </p:val>
+                                        </p:tav>
+                                      </p:tavLst>
+                                    </p:anim>
+                                  </p:childTnLst>
+                                </p:cTn>
+                              </p:par>
+                            </p:childTnLst>
+                          </p:cTn>
+                        </p:par>
+                      </p:childTnLst>
+                    </p:cTn>
+                  </p:par>
+                  <p:par>
+                    <p:cTn id="28" fill="hold">
+                      <p:stCondLst>
+                        <p:cond delay="indefinite"/>
+                      </p:stCondLst>
+                      <p:childTnLst>
+                        <p:par>
+                          <p:cTn id="27" fill="hold">
+                            <p:stCondLst>
+                              <p:cond delay="0"/>
+                            </p:stCondLst>
+                            <p:childTnLst>
+                              <p:par>
+                                <p:cTn id="23" presetID="21" presetClass="exit" presetSubtype="0" fill="hold" grpId="3" nodeType="clickEffect">
+                                  <p:stCondLst>
+                                    <p:cond delay="0"/>
+                                  </p:stCondLst>
+                                  <p:childTnLst>
+                                    <p:set>
+                                      <p:cBhvr>
+                                        <p:cTn id="24" dur="1" fill="hold">
+                                          <p:stCondLst>
+                                            <p:cond delay="0"/>
+                                          </p:stCondLst>
+                                        </p:cTn>
+                                        <p:tgtEl>
+                                          <p:spTgt spid="100015"/>
+                                        </p:tgtEl>
+                                        <p:attrNameLst>
+                                          <p:attrName>style.visibility</p:attrName>
+                                        </p:attrNameLst>
+                                      </p:cBhvr>
+                                      <p:to>
+                                        <p:strVal val="hidden"/>
+                                      </p:to>
+                                    </p:set>
                                     <p:animScale zoomContents="1">
                                       <p:cBhvr>
-                                        <p:cTn id="18" dur="700" fill="hold"/>
-                                        <p:tgtEl>
-                                          <p:spTgt spid="100014"/>
+                                        <p:cTn id="25" dur="700" fill="hold"/>
+                                        <p:tgtEl>
+                                          <p:spTgt spid="100015"/>
                                         </p:tgtEl>
                                       </p:cBhvr>
                                       <p:from x="100000" y="100000"/>
@@ -2030,32 +2239,32 @@
                     </p:cTn>
                   </p:par>
                   <p:par>
-                    <p:cTn id="27" fill="hold">
+                    <p:cTn id="34" fill="hold">
                       <p:stCondLst>
-                        <p:cond delay="0"/>
+                        <p:cond delay="indefinite"/>
                       </p:stCondLst>
                       <p:childTnLst>
                         <p:par>
-                          <p:cTn id="26" fill="hold">
+                          <p:cTn id="33" fill="hold">
                             <p:stCondLst>
                               <p:cond delay="0"/>
                             </p:stCondLst>
                             <p:childTnLst>
                               <p:par>
-                                <p:cTn id="22" presetID="9" presetClass="exit" presetSubtype="0" fill="hold" grpId="3" nodeType="afterEffect">
+                                <p:cTn id="29" presetID="20" presetClass="exit" presetSubtype="8" fill="hold" grpId="4" nodeType="clickEffect">
                                   <p:stCondLst>
                                     <p:cond delay="0"/>
                                   </p:stCondLst>
                                   <p:childTnLst>
                                     <p:set>
                                       <p:cBhvr>
-                                        <p:cTn id="23" dur="1" fill="hold">
+                                        <p:cTn id="30" dur="1" fill="hold">
                                           <p:stCondLst>
                                             <p:cond delay="0"/>
                                           </p:stCondLst>
                                         </p:cTn>
                                         <p:tgtEl>
-                                          <p:spTgt spid="100015"/>
+                                          <p:spTgt spid="100016"/>
                                         </p:tgtEl>
                                         <p:attrNameLst>
                                           <p:attrName>style.visibility</p:attrName>
@@ -2065,11 +2274,11 @@
                                         <p:strVal val="hidden"/>
                                       </p:to>
                                     </p:set>
-                                    <p:animEffect transition="out" filter="dissolve">
-                                      <p:cBhvr>
-                                        <p:cTn id="24" dur="600"/>
-                                        <p:tgtEl>
-                                          <p:spTgt spid="100015"/>
+                                    <p:animEffect transition="out" filter="wipe(left)">
+                                      <p:cBhvr>
+                                        <p:cTn id="31" dur="600"/>
+                                        <p:tgtEl>
+                                          <p:spTgt spid="100016"/>
                                         </p:tgtEl>
                                       </p:cBhvr>
                                     </p:animEffect>
@@ -2083,32 +2292,32 @@
                     </p:cTn>
                   </p:par>
                   <p:par>
-                    <p:cTn id="33" fill="hold">
+                    <p:cTn id="40" fill="hold">
                       <p:stCondLst>
-                        <p:cond delay="0"/>
+                        <p:cond delay="indefinite"/>
                       </p:stCondLst>
                       <p:childTnLst>
                         <p:par>
-                          <p:cTn id="32" fill="hold">
+                          <p:cTn id="39" fill="hold">
                             <p:stCondLst>
                               <p:cond delay="0"/>
                             </p:stCondLst>
                             <p:childTnLst>
                               <p:par>
-                                <p:cTn id="28" presetID="20" presetClass="exit" presetSubtype="1" fill="hold" grpId="4" nodeType="afterEffect">
+                                <p:cTn id="35" presetID="20" presetClass="exit" presetSubtype="2" fill="hold" grpId="5" nodeType="clickEffect">
                                   <p:stCondLst>
                                     <p:cond delay="0"/>
                                   </p:stCondLst>
                                   <p:childTnLst>
                                     <p:set>
                                       <p:cBhvr>
-                                        <p:cTn id="29" dur="1" fill="hold">
+                                        <p:cTn id="36" dur="1" fill="hold">
                                           <p:stCondLst>
                                             <p:cond delay="0"/>
                                           </p:stCondLst>
                                         </p:cTn>
                                         <p:tgtEl>
-                                          <p:spTgt spid="100016"/>
+                                          <p:spTgt spid="100017"/>
                                         </p:tgtEl>
                                         <p:attrNameLst>
                                           <p:attrName>style.visibility</p:attrName>
@@ -2120,9 +2329,9 @@
                                     </p:set>
                                     <p:animEffect transition="out" filter="wipe(left)">
                                       <p:cBhvr>
-                                        <p:cTn id="30" dur="600"/>
-                                        <p:tgtEl>
-                                          <p:spTgt spid="100016"/>
+                                        <p:cTn id="37" dur="600"/>
+                                        <p:tgtEl>
+                                          <p:spTgt spid="100017"/>
                                         </p:tgtEl>
                                       </p:cBhvr>
                                     </p:animEffect>
@@ -2136,32 +2345,191 @@
                     </p:cTn>
                   </p:par>
                   <p:par>
-                    <p:cTn id="39" fill="hold">
+                    <p:cTn id="46" fill="hold">
                       <p:stCondLst>
-                        <p:cond delay="0"/>
+                        <p:cond delay="indefinite"/>
                       </p:stCondLst>
                       <p:childTnLst>
                         <p:par>
-                          <p:cTn id="38" fill="hold">
+                          <p:cTn id="45" fill="hold">
                             <p:stCondLst>
                               <p:cond delay="0"/>
                             </p:stCondLst>
                             <p:childTnLst>
                               <p:par>
-                                <p:cTn id="34" presetID="11" presetClass="exit" presetSubtype="0" fill="hold" grpId="5" nodeType="afterEffect">
+                                <p:cTn id="41" presetID="9" presetClass="exit" presetSubtype="0" fill="hold" grpId="6" nodeType="clickEffect">
                                   <p:stCondLst>
                                     <p:cond delay="0"/>
                                   </p:stCondLst>
                                   <p:childTnLst>
                                     <p:set>
                                       <p:cBhvr>
-                                        <p:cTn id="35" dur="1" fill="hold">
+                                        <p:cTn id="42" dur="1" fill="hold">
                                           <p:stCondLst>
                                             <p:cond delay="0"/>
                                           </p:stCondLst>
                                         </p:cTn>
                                         <p:tgtEl>
-                                          <p:spTgt spid="100017"/>
+                                          <p:spTgt spid="100018"/>
+                                        </p:tgtEl>
+                                        <p:attrNameLst>
+                                          <p:attrName>style.visibility</p:attrName>
+                                        </p:attrNameLst>
+                                      </p:cBhvr>
+                                      <p:to>
+                                        <p:strVal val="hidden"/>
+                                      </p:to>
+                                    </p:set>
+                                    <p:animEffect transition="out" filter="dissolve">
+                                      <p:cBhvr>
+                                        <p:cTn id="43" dur="600"/>
+                                        <p:tgtEl>
+                                          <p:spTgt spid="100018"/>
+                                        </p:tgtEl>
+                                      </p:cBhvr>
+                                    </p:animEffect>
+                                  </p:childTnLst>
+                                </p:cTn>
+                              </p:par>
+                            </p:childTnLst>
+                          </p:cTn>
+                        </p:par>
+                      </p:childTnLst>
+                    </p:cTn>
+                  </p:par>
+                  <p:par>
+                    <p:cTn id="52" fill="hold">
+                      <p:stCondLst>
+                        <p:cond delay="indefinite"/>
+                      </p:stCondLst>
+                      <p:childTnLst>
+                        <p:par>
+                          <p:cTn id="51" fill="hold">
+                            <p:stCondLst>
+                              <p:cond delay="0"/>
+                            </p:stCondLst>
+                            <p:childTnLst>
+                              <p:par>
+                                <p:cTn id="47" presetID="15" presetClass="exit" presetSubtype="10" fill="hold" grpId="7" nodeType="clickEffect">
+                                  <p:stCondLst>
+                                    <p:cond delay="0"/>
+                                  </p:stCondLst>
+                                  <p:childTnLst>
+                                    <p:set>
+                                      <p:cBhvr>
+                                        <p:cTn id="48" dur="1" fill="hold">
+                                          <p:stCondLst>
+                                            <p:cond delay="0"/>
+                                          </p:stCondLst>
+                                        </p:cTn>
+                                        <p:tgtEl>
+                                          <p:spTgt spid="100019"/>
+                                        </p:tgtEl>
+                                        <p:attrNameLst>
+                                          <p:attrName>style.visibility</p:attrName>
+                                        </p:attrNameLst>
+                                      </p:cBhvr>
+                                      <p:to>
+                                        <p:strVal val="hidden"/>
+                                      </p:to>
+                                    </p:set>
+                                    <p:animEffect transition="out" filter="barn(inHorizontal)">
+                                      <p:cBhvr>
+                                        <p:cTn id="49" dur="600"/>
+                                        <p:tgtEl>
+                                          <p:spTgt spid="100019"/>
+                                        </p:tgtEl>
+                                      </p:cBhvr>
+                                    </p:animEffect>
+                                  </p:childTnLst>
+                                </p:cTn>
+                              </p:par>
+                            </p:childTnLst>
+                          </p:cTn>
+                        </p:par>
+                      </p:childTnLst>
+                    </p:cTn>
+                  </p:par>
+                  <p:par>
+                    <p:cTn id="58" fill="hold">
+                      <p:stCondLst>
+                        <p:cond delay="indefinite"/>
+                      </p:stCondLst>
+                      <p:childTnLst>
+                        <p:par>
+                          <p:cTn id="57" fill="hold">
+                            <p:stCondLst>
+                              <p:cond delay="0"/>
+                            </p:stCondLst>
+                            <p:childTnLst>
+                              <p:par>
+                                <p:cTn id="53" presetID="19" presetClass="exit" presetSubtype="1" fill="hold" grpId="8" nodeType="clickEffect">
+                                  <p:stCondLst>
+                                    <p:cond delay="0"/>
+                                  </p:stCondLst>
+                                  <p:childTnLst>
+                                    <p:set>
+                                      <p:cBhvr>
+                                        <p:cTn id="54" dur="1" fill="hold">
+                                          <p:stCondLst>
+                                            <p:cond delay="0"/>
+                                          </p:stCondLst>
+                                        </p:cTn>
+                                        <p:tgtEl>
+                                          <p:spTgt spid="100020"/>
+                                        </p:tgtEl>
+                                        <p:attrNameLst>
+                                          <p:attrName>style.visibility</p:attrName>
+                                        </p:attrNameLst>
+                                      </p:cBhvr>
+                                      <p:to>
+                                        <p:strVal val="hidden"/>
+                                      </p:to>
+                                    </p:set>
+                                    <p:animEffect transition="out" filter="wheel(1)">
+                                      <p:cBhvr>
+                                        <p:cTn id="55" dur="800"/>
+                                        <p:tgtEl>
+                                          <p:spTgt spid="100020"/>
+                                        </p:tgtEl>
+                                      </p:cBhvr>
+                                    </p:animEffect>
+                                  </p:childTnLst>
+                                </p:cTn>
+                              </p:par>
+                            </p:childTnLst>
+                          </p:cTn>
+                        </p:par>
+                      </p:childTnLst>
+                    </p:cTn>
+                  </p:par>
+                  <p:par>
+                    <p:cTn id="64" fill="hold">
+                      <p:stCondLst>
+                        <p:cond delay="indefinite"/>
+                      </p:stCondLst>
+                      <p:childTnLst>
+                        <p:par>
+                          <p:cTn id="63" fill="hold">
+                            <p:stCondLst>
+                              <p:cond delay="0"/>
+                            </p:stCondLst>
+                            <p:childTnLst>
+                              <p:par>
+                                <p:cTn id="59" presetID="11" presetClass="exit" presetSubtype="0" fill="hold" grpId="9" nodeType="clickEffect">
+                                  <p:stCondLst>
+                                    <p:cond delay="0"/>
+                                  </p:stCondLst>
+                                  <p:childTnLst>
+                                    <p:set>
+                                      <p:cBhvr>
+                                        <p:cTn id="60" dur="1" fill="hold">
+                                          <p:stCondLst>
+                                            <p:cond delay="0"/>
+                                          </p:stCondLst>
+                                        </p:cTn>
+                                        <p:tgtEl>
+                                          <p:spTgt spid="100021"/>
                                         </p:tgtEl>
                                         <p:attrNameLst>
                                           <p:attrName>style.visibility</p:attrName>
@@ -2173,9 +2541,9 @@
                                     </p:set>
                                     <p:animEffect transition="out" filter="flash">
                                       <p:cBhvr>
-                                        <p:cTn id="36" dur="500"/>
-                                        <p:tgtEl>
-                                          <p:spTgt spid="100017"/>
+                                        <p:cTn id="61" dur="500"/>
+                                        <p:tgtEl>
+                                          <p:spTgt spid="100021"/>
                                         </p:tgtEl>
                                       </p:cBhvr>
                                     </p:animEffect>
@@ -2216,6 +2584,10 @@
       <p:bldP spid="100015" grpId="3"/>
       <p:bldP spid="100016" grpId="4"/>
       <p:bldP spid="100017" grpId="5"/>
+      <p:bldP spid="100018" grpId="6"/>
+      <p:bldP spid="100019" grpId="7"/>
+      <p:bldP spid="100020" grpId="8"/>
+      <p:bldP spid="100021" grpId="9"/>
     </p:bldLst>
   </p:timing>
 </p:sld>
@@ -2262,20 +2634,20 @@
                   <a:srgbClr val="FFFFFF"/>
                 </a:solidFill>
               </a:rPr>
-              <a:t>Emphasis Effects</a:t>
-            </a:r>
-          </a:p>
-        </p:txBody>
-      </p:sp>
-      <p:sp>
-        <p:nvSpPr>
-          <p:cNvPr id="100018" name="TextBox 2"/>
+              <a:t>Emphasis &amp; Color Effects</a:t>
+            </a:r>
+          </a:p>
+        </p:txBody>
+      </p:sp>
+      <p:sp>
+        <p:nvSpPr>
+          <p:cNvPr id="100022" name="TextBox 2"/>
           <p:cNvSpPr/>
           <p:nvPr/>
         </p:nvSpPr>
         <p:spPr>
           <a:xfrm xmlns:a="http://schemas.openxmlformats.org/drawingml/2006/main">
-            <a:off x="720000" y="1620000"/>
+            <a:off x="540000" y="1440000"/>
             <a:ext cx="1620000" cy="1620000"/>
           </a:xfrm>
           <a:prstGeom xmlns:a="http://schemas.openxmlformats.org/drawingml/2006/main" prst="ellipse">
@@ -2290,7 +2662,7 @@
           <a:lstStyle xmlns:a="http://schemas.openxmlformats.org/drawingml/2006/main"/>
           <a:p xmlns:a="http://schemas.openxmlformats.org/drawingml/2006/main">
             <a:r>
-              <a:rPr lang="en-US" sz="1600">
+              <a:rPr lang="en-US" sz="1400">
                 <a:solidFill>
                   <a:srgbClr val="FFFFFF"/>
                 </a:solidFill>
@@ -2304,13 +2676,13 @@
       </p:sp>
       <p:sp>
         <p:nvSpPr>
-          <p:cNvPr id="100019" name="TextBox 3"/>
+          <p:cNvPr id="100023" name="TextBox 3"/>
           <p:cNvSpPr/>
           <p:nvPr/>
         </p:nvSpPr>
         <p:spPr>
           <a:xfrm xmlns:a="http://schemas.openxmlformats.org/drawingml/2006/main">
-            <a:off x="2880000" y="1620000"/>
+            <a:off x="2700000" y="1440000"/>
             <a:ext cx="1620000" cy="1620000"/>
           </a:xfrm>
           <a:prstGeom xmlns:a="http://schemas.openxmlformats.org/drawingml/2006/main" prst="ellipse">
@@ -2325,7 +2697,7 @@
           <a:lstStyle xmlns:a="http://schemas.openxmlformats.org/drawingml/2006/main"/>
           <a:p xmlns:a="http://schemas.openxmlformats.org/drawingml/2006/main">
             <a:r>
-              <a:rPr lang="en-US" sz="1600">
+              <a:rPr lang="en-US" sz="1400">
                 <a:solidFill>
                   <a:srgbClr val="FFFFFF"/>
                 </a:solidFill>
@@ -2339,13 +2711,13 @@
       </p:sp>
       <p:sp>
         <p:nvSpPr>
-          <p:cNvPr id="100020" name="TextBox 4"/>
+          <p:cNvPr id="100024" name="TextBox 4"/>
           <p:cNvSpPr/>
           <p:nvPr/>
         </p:nvSpPr>
         <p:spPr>
           <a:xfrm xmlns:a="http://schemas.openxmlformats.org/drawingml/2006/main">
-            <a:off x="5040000" y="1620000"/>
+            <a:off x="4860000" y="1440000"/>
             <a:ext cx="1620000" cy="1620000"/>
           </a:xfrm>
           <a:prstGeom xmlns:a="http://schemas.openxmlformats.org/drawingml/2006/main" prst="ellipse">
@@ -2360,7 +2732,7 @@
           <a:lstStyle xmlns:a="http://schemas.openxmlformats.org/drawingml/2006/main"/>
           <a:p xmlns:a="http://schemas.openxmlformats.org/drawingml/2006/main">
             <a:r>
-              <a:rPr lang="en-US" sz="1600">
+              <a:rPr lang="en-US" sz="1400">
                 <a:solidFill>
                   <a:srgbClr val="FFFFFF"/>
                 </a:solidFill>
@@ -2374,13 +2746,13 @@
       </p:sp>
       <p:sp>
         <p:nvSpPr>
-          <p:cNvPr id="100021" name="TextBox 5"/>
+          <p:cNvPr id="100025" name="TextBox 5"/>
           <p:cNvSpPr/>
           <p:nvPr/>
         </p:nvSpPr>
         <p:spPr>
           <a:xfrm xmlns:a="http://schemas.openxmlformats.org/drawingml/2006/main">
-            <a:off x="7200000" y="1620000"/>
+            <a:off x="540000" y="3240000"/>
             <a:ext cx="1620000" cy="1620000"/>
           </a:xfrm>
           <a:prstGeom xmlns:a="http://schemas.openxmlformats.org/drawingml/2006/main" prst="ellipse">
@@ -2395,14 +2767,84 @@
           <a:lstStyle xmlns:a="http://schemas.openxmlformats.org/drawingml/2006/main"/>
           <a:p xmlns:a="http://schemas.openxmlformats.org/drawingml/2006/main">
             <a:r>
-              <a:rPr lang="en-US" sz="1600">
+              <a:rPr lang="en-US" sz="1400">
                 <a:solidFill>
                   <a:srgbClr val="FFFFFF"/>
                 </a:solidFill>
                 <a:latin typeface="Consolas"/>
                 <a:ea typeface="Consolas"/>
               </a:rPr>
-              <a:t>bold</a:t>
+              <a:t>growShrink</a:t>
+            </a:r>
+          </a:p>
+        </p:txBody>
+      </p:sp>
+      <p:sp>
+        <p:nvSpPr>
+          <p:cNvPr id="100026" name="TextBox 6"/>
+          <p:cNvSpPr/>
+          <p:nvPr/>
+        </p:nvSpPr>
+        <p:spPr>
+          <a:xfrm xmlns:a="http://schemas.openxmlformats.org/drawingml/2006/main">
+            <a:off x="2700000" y="3240000"/>
+            <a:ext cx="1620000" cy="1620000"/>
+          </a:xfrm>
+          <a:prstGeom xmlns:a="http://schemas.openxmlformats.org/drawingml/2006/main" prst="ellipse">
+            <a:avLst/>
+          </a:prstGeom>
+          <a:solidFill xmlns:a="http://schemas.openxmlformats.org/drawingml/2006/main">
+            <a:srgbClr val="E67E22"/>
+          </a:solidFill>
+        </p:spPr>
+        <p:txBody>
+          <a:bodyPr xmlns:a="http://schemas.openxmlformats.org/drawingml/2006/main"/>
+          <a:lstStyle xmlns:a="http://schemas.openxmlformats.org/drawingml/2006/main"/>
+          <a:p xmlns:a="http://schemas.openxmlformats.org/drawingml/2006/main">
+            <a:r>
+              <a:rPr lang="en-US" sz="1400">
+                <a:solidFill>
+                  <a:srgbClr val="FFFFFF"/>
+                </a:solidFill>
+                <a:latin typeface="Consolas"/>
+                <a:ea typeface="Consolas"/>
+              </a:rPr>
+              <a:t>teeter</a:t>
+            </a:r>
+          </a:p>
+        </p:txBody>
+      </p:sp>
+      <p:sp>
+        <p:nvSpPr>
+          <p:cNvPr id="100027" name="TextBox 7"/>
+          <p:cNvSpPr/>
+          <p:nvPr/>
+        </p:nvSpPr>
+        <p:spPr>
+          <a:xfrm xmlns:a="http://schemas.openxmlformats.org/drawingml/2006/main">
+            <a:off x="4860000" y="3240000"/>
+            <a:ext cx="1620000" cy="1620000"/>
+          </a:xfrm>
+          <a:prstGeom xmlns:a="http://schemas.openxmlformats.org/drawingml/2006/main" prst="ellipse">
+            <a:avLst/>
+          </a:prstGeom>
+          <a:solidFill xmlns:a="http://schemas.openxmlformats.org/drawingml/2006/main">
+            <a:srgbClr val="1ABC9C"/>
+          </a:solidFill>
+        </p:spPr>
+        <p:txBody>
+          <a:bodyPr xmlns:a="http://schemas.openxmlformats.org/drawingml/2006/main"/>
+          <a:lstStyle xmlns:a="http://schemas.openxmlformats.org/drawingml/2006/main"/>
+          <a:p xmlns:a="http://schemas.openxmlformats.org/drawingml/2006/main">
+            <a:r>
+              <a:rPr lang="en-US" sz="1400">
+                <a:solidFill>
+                  <a:srgbClr val="FFFFFF"/>
+                </a:solidFill>
+                <a:latin typeface="Consolas"/>
+                <a:ea typeface="Consolas"/>
+              </a:rPr>
+              <a:t>pulse</a:t>
             </a:r>
           </a:p>
         </p:txBody>
@@ -2442,7 +2884,7 @@
                                       <p:cBhvr>
                                         <p:cTn id="3" dur="1000" fill="hold"/>
                                         <p:tgtEl>
-                                          <p:spTgt spid="100018"/>
+                                          <p:spTgt spid="100022"/>
                                         </p:tgtEl>
                                         <p:attrNameLst>
                                           <p:attrName>r</p:attrName>
@@ -2461,7 +2903,7 @@
                   <p:par>
                     <p:cTn id="10" fill="hold">
                       <p:stCondLst>
-                        <p:cond delay="0"/>
+                        <p:cond delay="indefinite"/>
                       </p:stCondLst>
                       <p:childTnLst>
                         <p:par>
@@ -2471,7 +2913,7 @@
                             </p:stCondLst>
                             <p:childTnLst>
                               <p:par>
-                                <p:cTn id="8" presetID="6" presetClass="emph" presetSubtype="0" dur="800" fill="hold" grpId="1" nodeType="afterEffect">
+                                <p:cTn id="8" presetID="6" presetClass="emph" presetSubtype="0" dur="800" fill="hold" grpId="1" nodeType="clickEffect">
                                   <p:stCondLst>
                                     <p:cond delay="0"/>
                                   </p:stCondLst>
@@ -2480,7 +2922,7 @@
                                       <p:cBhvr>
                                         <p:cTn id="7" dur="800" fill="hold"/>
                                         <p:tgtEl>
-                                          <p:spTgt spid="100019"/>
+                                          <p:spTgt spid="100023"/>
                                         </p:tgtEl>
                                       </p:cBhvr>
                                       <p:by x="150000" y="150000"/>
@@ -2497,7 +2939,7 @@
                   <p:par>
                     <p:cTn id="16" fill="hold">
                       <p:stCondLst>
-                        <p:cond delay="0"/>
+                        <p:cond delay="indefinite"/>
                       </p:stCondLst>
                       <p:childTnLst>
                         <p:par>
@@ -2507,7 +2949,7 @@
                             </p:stCondLst>
                             <p:childTnLst>
                               <p:par>
-                                <p:cTn id="11" presetID="14" presetClass="emph" presetSubtype="0" dur="700" fill="hold" grpId="2" nodeType="afterEffect">
+                                <p:cTn id="11" presetID="14" presetClass="emph" presetSubtype="0" dur="700" fill="hold" grpId="2" nodeType="clickEffect">
                                   <p:stCondLst>
                                     <p:cond delay="0"/>
                                   </p:stCondLst>
@@ -2520,7 +2962,7 @@
                                           </p:stCondLst>
                                         </p:cTn>
                                         <p:tgtEl>
-                                          <p:spTgt spid="100020"/>
+                                          <p:spTgt spid="100024"/>
                                         </p:tgtEl>
                                         <p:attrNameLst>
                                           <p:attrName>style.visibility</p:attrName>
@@ -2540,65 +2982,178 @@
                     </p:cTn>
                   </p:par>
                   <p:par>
-                    <p:cTn id="22" fill="hold">
+                    <p:cTn id="20" fill="hold">
                       <p:stCondLst>
-                        <p:cond delay="0"/>
+                        <p:cond delay="indefinite"/>
                       </p:stCondLst>
                       <p:childTnLst>
                         <p:par>
-                          <p:cTn id="21" fill="hold">
+                          <p:cTn id="19" fill="hold">
                             <p:stCondLst>
                               <p:cond delay="0"/>
                             </p:stCondLst>
                             <p:childTnLst>
                               <p:par>
-                                <p:cTn id="20" presetID="1" presetClass="emph" presetSubtype="2" dur="500" fill="hold" grpId="3" nodeType="afterEffect">
+                                <p:cTn id="18" presetID="6" presetClass="emph" presetSubtype="0" dur="800" fill="hold" grpId="3" nodeType="clickEffect">
                                   <p:stCondLst>
                                     <p:cond delay="0"/>
                                   </p:stCondLst>
                                   <p:childTnLst xmlns:p="http://schemas.openxmlformats.org/presentationml/2006/main" xmlns:a="http://schemas.openxmlformats.org/drawingml/2006/main" xmlns:r="http://schemas.openxmlformats.org/officeDocument/2006/relationships">
-                                    <p:animClr clrSpc="rgb" dir="cw">
-                                      <p:cBhvr>
-                                        <p:cTn id="17" dur="500" fill="hold"/>
-                                        <p:tgtEl>
-                                          <p:spTgt spid="100021"/>
+                                    <p:animScale>
+                                      <p:cBhvr>
+                                        <p:cTn id="17" dur="800" fill="hold"/>
+                                        <p:tgtEl>
+                                          <p:spTgt spid="100025"/>
+                                        </p:tgtEl>
+                                      </p:cBhvr>
+                                      <p:by x="150000" y="150000"/>
+                                    </p:animScale>
+                                  </p:childTnLst>
+                                </p:cTn>
+                              </p:par>
+                            </p:childTnLst>
+                          </p:cTn>
+                        </p:par>
+                      </p:childTnLst>
+                    </p:cTn>
+                  </p:par>
+                  <p:par>
+                    <p:cTn id="28" fill="hold">
+                      <p:stCondLst>
+                        <p:cond delay="indefinite"/>
+                      </p:stCondLst>
+                      <p:childTnLst>
+                        <p:par>
+                          <p:cTn id="27" fill="hold">
+                            <p:stCondLst>
+                              <p:cond delay="0"/>
+                            </p:stCondLst>
+                            <p:childTnLst>
+                              <p:par>
+                                <p:cTn id="26" presetID="32" presetClass="emph" presetSubtype="0" dur="600" fill="hold" grpId="4" nodeType="clickEffect">
+                                  <p:stCondLst>
+                                    <p:cond delay="0"/>
+                                  </p:stCondLst>
+                                  <p:childTnLst xmlns:p="http://schemas.openxmlformats.org/presentationml/2006/main" xmlns:a="http://schemas.openxmlformats.org/drawingml/2006/main" xmlns:r="http://schemas.openxmlformats.org/officeDocument/2006/relationships">
+                                    <p:animRot by="120000">
+                                      <p:cBhvr>
+                                        <p:cTn id="21" dur="600" fill="hold">
+                                          <p:stCondLst>
+                                            <p:cond delay="0"/>
+                                          </p:stCondLst>
+                                        </p:cTn>
+                                        <p:tgtEl>
+                                          <p:spTgt spid="100026"/>
                                         </p:tgtEl>
                                         <p:attrNameLst>
-                                          <p:attrName>fillcolor</p:attrName>
+                                          <p:attrName>r</p:attrName>
                                         </p:attrNameLst>
                                       </p:cBhvr>
-                                      <p:to>
-                                        <a:schemeClr val="accent2"/>
-                                      </p:to>
-                                    </p:animClr>
-                                    <p:set>
-                                      <p:cBhvr>
-                                        <p:cTn id="18" dur="2000" fill="hold"/>
-                                        <p:tgtEl>
-                                          <p:spTgt spid="100021"/>
+                                    </p:animRot>
+                                    <p:animRot by="-240000">
+                                      <p:cBhvr>
+                                        <p:cTn id="22" dur="200" fill="hold">
+                                          <p:stCondLst>
+                                            <p:cond delay="200"/>
+                                          </p:stCondLst>
+                                        </p:cTn>
+                                        <p:tgtEl>
+                                          <p:spTgt spid="100026"/>
                                         </p:tgtEl>
                                         <p:attrNameLst>
-                                          <p:attrName>fill.type</p:attrName>
+                                          <p:attrName>r</p:attrName>
                                         </p:attrNameLst>
                                       </p:cBhvr>
-                                      <p:to>
-                                        <p:strVal val="solid"/>
-                                      </p:to>
-                                    </p:set>
-                                    <p:set>
-                                      <p:cBhvr>
-                                        <p:cTn id="19" dur="2000" fill="hold"/>
-                                        <p:tgtEl>
-                                          <p:spTgt spid="100021"/>
+                                    </p:animRot>
+                                    <p:animRot by="240000">
+                                      <p:cBhvr>
+                                        <p:cTn id="23" dur="200" fill="hold">
+                                          <p:stCondLst>
+                                            <p:cond delay="400"/>
+                                          </p:stCondLst>
+                                        </p:cTn>
+                                        <p:tgtEl>
+                                          <p:spTgt spid="100026"/>
                                         </p:tgtEl>
                                         <p:attrNameLst>
-                                          <p:attrName>fill.on</p:attrName>
+                                          <p:attrName>r</p:attrName>
                                         </p:attrNameLst>
                                       </p:cBhvr>
-                                      <p:to>
-                                        <p:strVal val="true"/>
-                                      </p:to>
-                                    </p:set>
+                                    </p:animRot>
+                                    <p:animRot by="-240000">
+                                      <p:cBhvr>
+                                        <p:cTn id="24" dur="200" fill="hold">
+                                          <p:stCondLst>
+                                            <p:cond delay="600"/>
+                                          </p:stCondLst>
+                                        </p:cTn>
+                                        <p:tgtEl>
+                                          <p:spTgt spid="100026"/>
+                                        </p:tgtEl>
+                                        <p:attrNameLst>
+                                          <p:attrName>r</p:attrName>
+                                        </p:attrNameLst>
+                                      </p:cBhvr>
+                                    </p:animRot>
+                                    <p:animRot by="120000">
+                                      <p:cBhvr>
+                                        <p:cTn id="25" dur="200" fill="hold">
+                                          <p:stCondLst>
+                                            <p:cond delay="800"/>
+                                          </p:stCondLst>
+                                        </p:cTn>
+                                        <p:tgtEl>
+                                          <p:spTgt spid="100026"/>
+                                        </p:tgtEl>
+                                        <p:attrNameLst>
+                                          <p:attrName>r</p:attrName>
+                                        </p:attrNameLst>
+                                      </p:cBhvr>
+                                    </p:animRot>
+                                  </p:childTnLst>
+                                </p:cTn>
+                              </p:par>
+                            </p:childTnLst>
+                          </p:cTn>
+                        </p:par>
+                      </p:childTnLst>
+                    </p:cTn>
+                  </p:par>
+                  <p:par>
+                    <p:cTn id="33" fill="hold">
+                      <p:stCondLst>
+                        <p:cond delay="indefinite"/>
+                      </p:stCondLst>
+                      <p:childTnLst>
+                        <p:par>
+                          <p:cTn id="32" fill="hold">
+                            <p:stCondLst>
+                              <p:cond delay="0"/>
+                            </p:stCondLst>
+                            <p:childTnLst>
+                              <p:par>
+                                <p:cTn id="31" presetID="26" presetClass="emph" presetSubtype="0" dur="500" fill="hold" grpId="5" nodeType="clickEffect">
+                                  <p:stCondLst>
+                                    <p:cond delay="0"/>
+                                  </p:stCondLst>
+                                  <p:childTnLst xmlns:p="http://schemas.openxmlformats.org/presentationml/2006/main" xmlns:a="http://schemas.openxmlformats.org/drawingml/2006/main" xmlns:r="http://schemas.openxmlformats.org/officeDocument/2006/relationships">
+                                    <p:animEffect transition="out" filter="fade">
+                                      <p:cBhvr>
+                                        <p:cTn id="29" dur="500" tmFilter="0, 0; .2, .5; .8, .5; 1, 0"/>
+                                        <p:tgtEl>
+                                          <p:spTgt spid="100027"/>
+                                        </p:tgtEl>
+                                      </p:cBhvr>
+                                    </p:animEffect>
+                                    <p:animScale>
+                                      <p:cBhvr>
+                                        <p:cTn id="30" dur="250" autoRev="1" fill="hold"/>
+                                        <p:tgtEl>
+                                          <p:spTgt spid="100027"/>
+                                        </p:tgtEl>
+                                      </p:cBhvr>
+                                      <p:by x="105000" y="105000"/>
+                                    </p:animScale>
                                   </p:childTnLst>
                                 </p:cTn>
                               </p:par>
@@ -2630,10 +3185,12 @@
       </p:par>
     </p:tnLst>
     <p:bldLst>
-      <p:bldP spid="100018" grpId="0"/>
-      <p:bldP spid="100019" grpId="1"/>
-      <p:bldP spid="100020" grpId="2"/>
-      <p:bldP spid="100021" grpId="3"/>
+      <p:bldP spid="100022" grpId="0"/>
+      <p:bldP spid="100023" grpId="1"/>
+      <p:bldP spid="100024" grpId="2"/>
+      <p:bldP spid="100025" grpId="3"/>
+      <p:bldP spid="100026" grpId="4"/>
+      <p:bldP spid="100027" grpId="5"/>
     </p:bldLst>
   </p:timing>
 </p:sld>
@@ -2645,7 +3202,7 @@
     <p:bg>
       <p:bgPr>
         <a:solidFill xmlns:a="http://schemas.openxmlformats.org/drawingml/2006/main">
-          <a:srgbClr val="0D1B2A"/>
+          <a:srgbClr val="1B2838"/>
         </a:solidFill>
       </p:bgPr>
     </p:bg>
@@ -2680,527 +3237,252 @@
                   <a:srgbClr val="FFFFFF"/>
                 </a:solidFill>
               </a:rPr>
-              <a:t>Slide Transitions</a:t>
-            </a:r>
-          </a:p>
-        </p:txBody>
-      </p:sp>
-      <p:sp>
-        <p:nvSpPr>
-          <p:cNvPr id="100022" name="TextBox 2"/>
+              <a:t>Motion Paths</a:t>
+            </a:r>
+          </a:p>
+        </p:txBody>
+      </p:sp>
+      <p:sp>
+        <p:nvSpPr>
+          <p:cNvPr id="100028" name="TextBox 2"/>
           <p:cNvSpPr/>
           <p:nvPr/>
         </p:nvSpPr>
         <p:spPr>
           <a:xfrm xmlns:a="http://schemas.openxmlformats.org/drawingml/2006/main">
             <a:off x="360000" y="1440000"/>
-            <a:ext cx="1800000" cy="648000"/>
+            <a:ext cx="2160000" cy="720000"/>
           </a:xfrm>
           <a:prstGeom xmlns:a="http://schemas.openxmlformats.org/drawingml/2006/main" prst="roundRect">
             <a:avLst/>
           </a:prstGeom>
           <a:solidFill xmlns:a="http://schemas.openxmlformats.org/drawingml/2006/main">
-            <a:srgbClr val="2C3E50"/>
+            <a:srgbClr val="2E86C1"/>
           </a:solidFill>
-          <a:ln xmlns:a="http://schemas.openxmlformats.org/drawingml/2006/main" w="6350">
-            <a:solidFill>
-              <a:srgbClr val="5DADE2"/>
-            </a:solidFill>
-          </a:ln>
-        </p:spPr>
-        <p:txBody>
-          <a:bodyPr xmlns:a="http://schemas.openxmlformats.org/drawingml/2006/main"/>
-          <a:lstStyle xmlns:a="http://schemas.openxmlformats.org/drawingml/2006/main"/>
-          <a:p xmlns:a="http://schemas.openxmlformats.org/drawingml/2006/main">
-            <a:r>
-              <a:rPr lang="en-US" sz="1200">
+        </p:spPr>
+        <p:txBody>
+          <a:bodyPr xmlns:a="http://schemas.openxmlformats.org/drawingml/2006/main"/>
+          <a:lstStyle xmlns:a="http://schemas.openxmlformats.org/drawingml/2006/main"/>
+          <a:p xmlns:a="http://schemas.openxmlformats.org/drawingml/2006/main">
+            <a:r>
+              <a:rPr lang="en-US" sz="1300">
                 <a:solidFill>
                   <a:srgbClr val="FFFFFF"/>
                 </a:solidFill>
                 <a:latin typeface="Consolas"/>
                 <a:ea typeface="Consolas"/>
               </a:rPr>
-              <a:t>fade</a:t>
-            </a:r>
-          </a:p>
-        </p:txBody>
-      </p:sp>
-      <p:sp>
-        <p:nvSpPr>
-          <p:cNvPr id="100023" name="TextBox 3"/>
+              <a:t>line right</a:t>
+            </a:r>
+          </a:p>
+        </p:txBody>
+      </p:sp>
+      <p:sp>
+        <p:nvSpPr>
+          <p:cNvPr id="100029" name="TextBox 3"/>
           <p:cNvSpPr/>
           <p:nvPr/>
         </p:nvSpPr>
         <p:spPr>
           <a:xfrm xmlns:a="http://schemas.openxmlformats.org/drawingml/2006/main">
             <a:off x="2520000" y="1440000"/>
-            <a:ext cx="1800000" cy="648000"/>
+            <a:ext cx="2160000" cy="720000"/>
           </a:xfrm>
           <a:prstGeom xmlns:a="http://schemas.openxmlformats.org/drawingml/2006/main" prst="roundRect">
             <a:avLst/>
           </a:prstGeom>
           <a:solidFill xmlns:a="http://schemas.openxmlformats.org/drawingml/2006/main">
-            <a:srgbClr val="2C3E50"/>
+            <a:srgbClr val="27AE60"/>
           </a:solidFill>
-          <a:ln xmlns:a="http://schemas.openxmlformats.org/drawingml/2006/main" w="6350">
-            <a:solidFill>
-              <a:srgbClr val="5DADE2"/>
-            </a:solidFill>
-          </a:ln>
-        </p:spPr>
-        <p:txBody>
-          <a:bodyPr xmlns:a="http://schemas.openxmlformats.org/drawingml/2006/main"/>
-          <a:lstStyle xmlns:a="http://schemas.openxmlformats.org/drawingml/2006/main"/>
-          <a:p xmlns:a="http://schemas.openxmlformats.org/drawingml/2006/main">
-            <a:r>
-              <a:rPr lang="en-US" sz="1200">
+        </p:spPr>
+        <p:txBody>
+          <a:bodyPr xmlns:a="http://schemas.openxmlformats.org/drawingml/2006/main"/>
+          <a:lstStyle xmlns:a="http://schemas.openxmlformats.org/drawingml/2006/main"/>
+          <a:p xmlns:a="http://schemas.openxmlformats.org/drawingml/2006/main">
+            <a:r>
+              <a:rPr lang="en-US" sz="1300">
                 <a:solidFill>
                   <a:srgbClr val="FFFFFF"/>
                 </a:solidFill>
                 <a:latin typeface="Consolas"/>
                 <a:ea typeface="Consolas"/>
               </a:rPr>
-              <a:t>wipe</a:t>
-            </a:r>
-          </a:p>
-        </p:txBody>
-      </p:sp>
-      <p:sp>
-        <p:nvSpPr>
-          <p:cNvPr id="100024" name="TextBox 4"/>
+              <a:t>line down</a:t>
+            </a:r>
+          </a:p>
+        </p:txBody>
+      </p:sp>
+      <p:sp>
+        <p:nvSpPr>
+          <p:cNvPr id="100030" name="TextBox 4"/>
           <p:cNvSpPr/>
           <p:nvPr/>
         </p:nvSpPr>
         <p:spPr>
           <a:xfrm xmlns:a="http://schemas.openxmlformats.org/drawingml/2006/main">
             <a:off x="4680000" y="1440000"/>
-            <a:ext cx="1800000" cy="648000"/>
+            <a:ext cx="2160000" cy="720000"/>
           </a:xfrm>
           <a:prstGeom xmlns:a="http://schemas.openxmlformats.org/drawingml/2006/main" prst="roundRect">
             <a:avLst/>
           </a:prstGeom>
           <a:solidFill xmlns:a="http://schemas.openxmlformats.org/drawingml/2006/main">
-            <a:srgbClr val="2C3E50"/>
+            <a:srgbClr val="E74C3C"/>
           </a:solidFill>
-          <a:ln xmlns:a="http://schemas.openxmlformats.org/drawingml/2006/main" w="6350">
-            <a:solidFill>
-              <a:srgbClr val="5DADE2"/>
-            </a:solidFill>
-          </a:ln>
-        </p:spPr>
-        <p:txBody>
-          <a:bodyPr xmlns:a="http://schemas.openxmlformats.org/drawingml/2006/main"/>
-          <a:lstStyle xmlns:a="http://schemas.openxmlformats.org/drawingml/2006/main"/>
-          <a:p xmlns:a="http://schemas.openxmlformats.org/drawingml/2006/main">
-            <a:r>
-              <a:rPr lang="en-US" sz="1200">
+        </p:spPr>
+        <p:txBody>
+          <a:bodyPr xmlns:a="http://schemas.openxmlformats.org/drawingml/2006/main"/>
+          <a:lstStyle xmlns:a="http://schemas.openxmlformats.org/drawingml/2006/main"/>
+          <a:p xmlns:a="http://schemas.openxmlformats.org/drawingml/2006/main">
+            <a:r>
+              <a:rPr lang="en-US" sz="1300">
                 <a:solidFill>
                   <a:srgbClr val="FFFFFF"/>
                 </a:solidFill>
                 <a:latin typeface="Consolas"/>
                 <a:ea typeface="Consolas"/>
               </a:rPr>
-              <a:t>push</a:t>
-            </a:r>
-          </a:p>
-        </p:txBody>
-      </p:sp>
-      <p:sp>
-        <p:nvSpPr>
-          <p:cNvPr id="100025" name="TextBox 5"/>
+              <a:t>arc</a:t>
+            </a:r>
+          </a:p>
+        </p:txBody>
+      </p:sp>
+      <p:sp>
+        <p:nvSpPr>
+          <p:cNvPr id="100031" name="TextBox 5"/>
           <p:cNvSpPr/>
           <p:nvPr/>
         </p:nvSpPr>
         <p:spPr>
           <a:xfrm xmlns:a="http://schemas.openxmlformats.org/drawingml/2006/main">
-            <a:off x="6840000" y="1440000"/>
-            <a:ext cx="1800000" cy="648000"/>
+            <a:off x="360000" y="2880000"/>
+            <a:ext cx="2160000" cy="720000"/>
           </a:xfrm>
           <a:prstGeom xmlns:a="http://schemas.openxmlformats.org/drawingml/2006/main" prst="roundRect">
             <a:avLst/>
           </a:prstGeom>
           <a:solidFill xmlns:a="http://schemas.openxmlformats.org/drawingml/2006/main">
-            <a:srgbClr val="2C3E50"/>
+            <a:srgbClr val="8E44AD"/>
           </a:solidFill>
-          <a:ln xmlns:a="http://schemas.openxmlformats.org/drawingml/2006/main" w="6350">
-            <a:solidFill>
-              <a:srgbClr val="5DADE2"/>
-            </a:solidFill>
-          </a:ln>
-        </p:spPr>
-        <p:txBody>
-          <a:bodyPr xmlns:a="http://schemas.openxmlformats.org/drawingml/2006/main"/>
-          <a:lstStyle xmlns:a="http://schemas.openxmlformats.org/drawingml/2006/main"/>
-          <a:p xmlns:a="http://schemas.openxmlformats.org/drawingml/2006/main">
-            <a:r>
-              <a:rPr lang="en-US" sz="1200">
+        </p:spPr>
+        <p:txBody>
+          <a:bodyPr xmlns:a="http://schemas.openxmlformats.org/drawingml/2006/main"/>
+          <a:lstStyle xmlns:a="http://schemas.openxmlformats.org/drawingml/2006/main"/>
+          <a:p xmlns:a="http://schemas.openxmlformats.org/drawingml/2006/main">
+            <a:r>
+              <a:rPr lang="en-US" sz="1300">
                 <a:solidFill>
                   <a:srgbClr val="FFFFFF"/>
                 </a:solidFill>
                 <a:latin typeface="Consolas"/>
                 <a:ea typeface="Consolas"/>
               </a:rPr>
-              <a:t>split</a:t>
-            </a:r>
-          </a:p>
-        </p:txBody>
-      </p:sp>
-      <p:sp>
-        <p:nvSpPr>
-          <p:cNvPr id="100026" name="TextBox 6"/>
+              <a:t>circle</a:t>
+            </a:r>
+          </a:p>
+        </p:txBody>
+      </p:sp>
+      <p:sp>
+        <p:nvSpPr>
+          <p:cNvPr id="100032" name="TextBox 6"/>
           <p:cNvSpPr/>
           <p:nvPr/>
         </p:nvSpPr>
         <p:spPr>
           <a:xfrm xmlns:a="http://schemas.openxmlformats.org/drawingml/2006/main">
-            <a:off x="360000" y="2340000"/>
-            <a:ext cx="1800000" cy="648000"/>
+            <a:off x="2520000" y="2880000"/>
+            <a:ext cx="2160000" cy="720000"/>
           </a:xfrm>
           <a:prstGeom xmlns:a="http://schemas.openxmlformats.org/drawingml/2006/main" prst="roundRect">
             <a:avLst/>
           </a:prstGeom>
           <a:solidFill xmlns:a="http://schemas.openxmlformats.org/drawingml/2006/main">
-            <a:srgbClr val="2C3E50"/>
+            <a:srgbClr val="F39C12"/>
           </a:solidFill>
-          <a:ln xmlns:a="http://schemas.openxmlformats.org/drawingml/2006/main" w="6350">
-            <a:solidFill>
-              <a:srgbClr val="5DADE2"/>
-            </a:solidFill>
-          </a:ln>
-        </p:spPr>
-        <p:txBody>
-          <a:bodyPr xmlns:a="http://schemas.openxmlformats.org/drawingml/2006/main"/>
-          <a:lstStyle xmlns:a="http://schemas.openxmlformats.org/drawingml/2006/main"/>
-          <a:p xmlns:a="http://schemas.openxmlformats.org/drawingml/2006/main">
-            <a:r>
-              <a:rPr lang="en-US" sz="1200">
+        </p:spPr>
+        <p:txBody>
+          <a:bodyPr xmlns:a="http://schemas.openxmlformats.org/drawingml/2006/main"/>
+          <a:lstStyle xmlns:a="http://schemas.openxmlformats.org/drawingml/2006/main"/>
+          <a:p xmlns:a="http://schemas.openxmlformats.org/drawingml/2006/main">
+            <a:r>
+              <a:rPr lang="en-US" sz="1300">
                 <a:solidFill>
                   <a:srgbClr val="FFFFFF"/>
                 </a:solidFill>
                 <a:latin typeface="Consolas"/>
                 <a:ea typeface="Consolas"/>
               </a:rPr>
-              <a:t>zoom</a:t>
-            </a:r>
-          </a:p>
-        </p:txBody>
-      </p:sp>
-      <p:sp>
-        <p:nvSpPr>
-          <p:cNvPr id="100027" name="TextBox 7"/>
+              <a:t>diamond</a:t>
+            </a:r>
+          </a:p>
+        </p:txBody>
+      </p:sp>
+      <p:sp>
+        <p:nvSpPr>
+          <p:cNvPr id="100033" name="TextBox 7"/>
           <p:cNvSpPr/>
           <p:nvPr/>
         </p:nvSpPr>
         <p:spPr>
           <a:xfrm xmlns:a="http://schemas.openxmlformats.org/drawingml/2006/main">
-            <a:off x="2520000" y="2340000"/>
-            <a:ext cx="1800000" cy="648000"/>
+            <a:off x="4680000" y="2880000"/>
+            <a:ext cx="2160000" cy="720000"/>
           </a:xfrm>
           <a:prstGeom xmlns:a="http://schemas.openxmlformats.org/drawingml/2006/main" prst="roundRect">
             <a:avLst/>
           </a:prstGeom>
           <a:solidFill xmlns:a="http://schemas.openxmlformats.org/drawingml/2006/main">
-            <a:srgbClr val="2C3E50"/>
+            <a:srgbClr val="16A085"/>
           </a:solidFill>
-          <a:ln xmlns:a="http://schemas.openxmlformats.org/drawingml/2006/main" w="6350">
-            <a:solidFill>
-              <a:srgbClr val="5DADE2"/>
-            </a:solidFill>
-          </a:ln>
-        </p:spPr>
-        <p:txBody>
-          <a:bodyPr xmlns:a="http://schemas.openxmlformats.org/drawingml/2006/main"/>
-          <a:lstStyle xmlns:a="http://schemas.openxmlformats.org/drawingml/2006/main"/>
-          <a:p xmlns:a="http://schemas.openxmlformats.org/drawingml/2006/main">
-            <a:r>
-              <a:rPr lang="en-US" sz="1200">
+        </p:spPr>
+        <p:txBody>
+          <a:bodyPr xmlns:a="http://schemas.openxmlformats.org/drawingml/2006/main"/>
+          <a:lstStyle xmlns:a="http://schemas.openxmlformats.org/drawingml/2006/main"/>
+          <a:p xmlns:a="http://schemas.openxmlformats.org/drawingml/2006/main">
+            <a:r>
+              <a:rPr lang="en-US" sz="1300">
                 <a:solidFill>
                   <a:srgbClr val="FFFFFF"/>
                 </a:solidFill>
                 <a:latin typeface="Consolas"/>
                 <a:ea typeface="Consolas"/>
               </a:rPr>
-              <a:t>wheel</a:t>
-            </a:r>
-          </a:p>
-        </p:txBody>
-      </p:sp>
-      <p:sp>
-        <p:nvSpPr>
-          <p:cNvPr id="100028" name="TextBox 8"/>
+              <a:t>square</a:t>
+            </a:r>
+          </a:p>
+        </p:txBody>
+      </p:sp>
+      <p:sp>
+        <p:nvSpPr>
+          <p:cNvPr id="100034" name="TextBox 8"/>
           <p:cNvSpPr/>
           <p:nvPr/>
         </p:nvSpPr>
         <p:spPr>
           <a:xfrm xmlns:a="http://schemas.openxmlformats.org/drawingml/2006/main">
-            <a:off x="4680000" y="2340000"/>
-            <a:ext cx="1800000" cy="648000"/>
+            <a:off x="360000" y="4320000"/>
+            <a:ext cx="2160000" cy="720000"/>
           </a:xfrm>
           <a:prstGeom xmlns:a="http://schemas.openxmlformats.org/drawingml/2006/main" prst="roundRect">
             <a:avLst/>
           </a:prstGeom>
           <a:solidFill xmlns:a="http://schemas.openxmlformats.org/drawingml/2006/main">
-            <a:srgbClr val="2C3E50"/>
+            <a:srgbClr val="C0392B"/>
           </a:solidFill>
-          <a:ln xmlns:a="http://schemas.openxmlformats.org/drawingml/2006/main" w="6350">
-            <a:solidFill>
-              <a:srgbClr val="5DADE2"/>
-            </a:solidFill>
-          </a:ln>
-        </p:spPr>
-        <p:txBody>
-          <a:bodyPr xmlns:a="http://schemas.openxmlformats.org/drawingml/2006/main"/>
-          <a:lstStyle xmlns:a="http://schemas.openxmlformats.org/drawingml/2006/main"/>
-          <a:p xmlns:a="http://schemas.openxmlformats.org/drawingml/2006/main">
-            <a:r>
-              <a:rPr lang="en-US" sz="1200">
+        </p:spPr>
+        <p:txBody>
+          <a:bodyPr xmlns:a="http://schemas.openxmlformats.org/drawingml/2006/main"/>
+          <a:lstStyle xmlns:a="http://schemas.openxmlformats.org/drawingml/2006/main"/>
+          <a:p xmlns:a="http://schemas.openxmlformats.org/drawingml/2006/main">
+            <a:r>
+              <a:rPr lang="en-US" sz="1300">
                 <a:solidFill>
                   <a:srgbClr val="FFFFFF"/>
                 </a:solidFill>
                 <a:latin typeface="Consolas"/>
                 <a:ea typeface="Consolas"/>
               </a:rPr>
-              <a:t>cover</a:t>
-            </a:r>
-          </a:p>
-        </p:txBody>
-      </p:sp>
-      <p:sp>
-        <p:nvSpPr>
-          <p:cNvPr id="100029" name="TextBox 9"/>
-          <p:cNvSpPr/>
-          <p:nvPr/>
-        </p:nvSpPr>
-        <p:spPr>
-          <a:xfrm xmlns:a="http://schemas.openxmlformats.org/drawingml/2006/main">
-            <a:off x="6840000" y="2340000"/>
-            <a:ext cx="1800000" cy="648000"/>
-          </a:xfrm>
-          <a:prstGeom xmlns:a="http://schemas.openxmlformats.org/drawingml/2006/main" prst="roundRect">
-            <a:avLst/>
-          </a:prstGeom>
-          <a:solidFill xmlns:a="http://schemas.openxmlformats.org/drawingml/2006/main">
-            <a:srgbClr val="2C3E50"/>
-          </a:solidFill>
-          <a:ln xmlns:a="http://schemas.openxmlformats.org/drawingml/2006/main" w="6350">
-            <a:solidFill>
-              <a:srgbClr val="5DADE2"/>
-            </a:solidFill>
-          </a:ln>
-        </p:spPr>
-        <p:txBody>
-          <a:bodyPr xmlns:a="http://schemas.openxmlformats.org/drawingml/2006/main"/>
-          <a:lstStyle xmlns:a="http://schemas.openxmlformats.org/drawingml/2006/main"/>
-          <a:p xmlns:a="http://schemas.openxmlformats.org/drawingml/2006/main">
-            <a:r>
-              <a:rPr lang="en-US" sz="1200">
-                <a:solidFill>
-                  <a:srgbClr val="FFFFFF"/>
-                </a:solidFill>
-                <a:latin typeface="Consolas"/>
-                <a:ea typeface="Consolas"/>
-              </a:rPr>
-              <a:t>reveal</a:t>
-            </a:r>
-          </a:p>
-        </p:txBody>
-      </p:sp>
-      <p:sp>
-        <p:nvSpPr>
-          <p:cNvPr id="100030" name="TextBox 10"/>
-          <p:cNvSpPr/>
-          <p:nvPr/>
-        </p:nvSpPr>
-        <p:spPr>
-          <a:xfrm xmlns:a="http://schemas.openxmlformats.org/drawingml/2006/main">
-            <a:off x="360000" y="3240000"/>
-            <a:ext cx="1800000" cy="648000"/>
-          </a:xfrm>
-          <a:prstGeom xmlns:a="http://schemas.openxmlformats.org/drawingml/2006/main" prst="roundRect">
-            <a:avLst/>
-          </a:prstGeom>
-          <a:solidFill xmlns:a="http://schemas.openxmlformats.org/drawingml/2006/main">
-            <a:srgbClr val="2C3E50"/>
-          </a:solidFill>
-          <a:ln xmlns:a="http://schemas.openxmlformats.org/drawingml/2006/main" w="6350">
-            <a:solidFill>
-              <a:srgbClr val="5DADE2"/>
-            </a:solidFill>
-          </a:ln>
-        </p:spPr>
-        <p:txBody>
-          <a:bodyPr xmlns:a="http://schemas.openxmlformats.org/drawingml/2006/main"/>
-          <a:lstStyle xmlns:a="http://schemas.openxmlformats.org/drawingml/2006/main"/>
-          <a:p xmlns:a="http://schemas.openxmlformats.org/drawingml/2006/main">
-            <a:r>
-              <a:rPr lang="en-US" sz="1200">
-                <a:solidFill>
-                  <a:srgbClr val="FFFFFF"/>
-                </a:solidFill>
-                <a:latin typeface="Consolas"/>
-                <a:ea typeface="Consolas"/>
-              </a:rPr>
-              <a:t>dissolve</a:t>
-            </a:r>
-          </a:p>
-        </p:txBody>
-      </p:sp>
-      <p:sp>
-        <p:nvSpPr>
-          <p:cNvPr id="100031" name="TextBox 11"/>
-          <p:cNvSpPr/>
-          <p:nvPr/>
-        </p:nvSpPr>
-        <p:spPr>
-          <a:xfrm xmlns:a="http://schemas.openxmlformats.org/drawingml/2006/main">
-            <a:off x="2520000" y="3240000"/>
-            <a:ext cx="1800000" cy="648000"/>
-          </a:xfrm>
-          <a:prstGeom xmlns:a="http://schemas.openxmlformats.org/drawingml/2006/main" prst="roundRect">
-            <a:avLst/>
-          </a:prstGeom>
-          <a:solidFill xmlns:a="http://schemas.openxmlformats.org/drawingml/2006/main">
-            <a:srgbClr val="2C3E50"/>
-          </a:solidFill>
-          <a:ln xmlns:a="http://schemas.openxmlformats.org/drawingml/2006/main" w="6350">
-            <a:solidFill>
-              <a:srgbClr val="5DADE2"/>
-            </a:solidFill>
-          </a:ln>
-        </p:spPr>
-        <p:txBody>
-          <a:bodyPr xmlns:a="http://schemas.openxmlformats.org/drawingml/2006/main"/>
-          <a:lstStyle xmlns:a="http://schemas.openxmlformats.org/drawingml/2006/main"/>
-          <a:p xmlns:a="http://schemas.openxmlformats.org/drawingml/2006/main">
-            <a:r>
-              <a:rPr lang="en-US" sz="1200">
-                <a:solidFill>
-                  <a:srgbClr val="FFFFFF"/>
-                </a:solidFill>
-                <a:latin typeface="Consolas"/>
-                <a:ea typeface="Consolas"/>
-              </a:rPr>
-              <a:t>random</a:t>
-            </a:r>
-          </a:p>
-        </p:txBody>
-      </p:sp>
-      <p:sp>
-        <p:nvSpPr>
-          <p:cNvPr id="100032" name="TextBox 12"/>
-          <p:cNvSpPr/>
-          <p:nvPr/>
-        </p:nvSpPr>
-        <p:spPr>
-          <a:xfrm xmlns:a="http://schemas.openxmlformats.org/drawingml/2006/main">
-            <a:off x="4680000" y="3240000"/>
-            <a:ext cx="1800000" cy="648000"/>
-          </a:xfrm>
-          <a:prstGeom xmlns:a="http://schemas.openxmlformats.org/drawingml/2006/main" prst="roundRect">
-            <a:avLst/>
-          </a:prstGeom>
-          <a:solidFill xmlns:a="http://schemas.openxmlformats.org/drawingml/2006/main">
-            <a:srgbClr val="2C3E50"/>
-          </a:solidFill>
-          <a:ln xmlns:a="http://schemas.openxmlformats.org/drawingml/2006/main" w="6350">
-            <a:solidFill>
-              <a:srgbClr val="5DADE2"/>
-            </a:solidFill>
-          </a:ln>
-        </p:spPr>
-        <p:txBody>
-          <a:bodyPr xmlns:a="http://schemas.openxmlformats.org/drawingml/2006/main"/>
-          <a:lstStyle xmlns:a="http://schemas.openxmlformats.org/drawingml/2006/main"/>
-          <a:p xmlns:a="http://schemas.openxmlformats.org/drawingml/2006/main">
-            <a:r>
-              <a:rPr lang="en-US" sz="1200">
-                <a:solidFill>
-                  <a:srgbClr val="FFFFFF"/>
-                </a:solidFill>
-                <a:latin typeface="Consolas"/>
-                <a:ea typeface="Consolas"/>
-              </a:rPr>
-              <a:t>blinds</a:t>
-            </a:r>
-          </a:p>
-        </p:txBody>
-      </p:sp>
-      <p:sp>
-        <p:nvSpPr>
-          <p:cNvPr id="100033" name="TextBox 13"/>
-          <p:cNvSpPr/>
-          <p:nvPr/>
-        </p:nvSpPr>
-        <p:spPr>
-          <a:xfrm xmlns:a="http://schemas.openxmlformats.org/drawingml/2006/main">
-            <a:off x="6840000" y="3240000"/>
-            <a:ext cx="1800000" cy="648000"/>
-          </a:xfrm>
-          <a:prstGeom xmlns:a="http://schemas.openxmlformats.org/drawingml/2006/main" prst="roundRect">
-            <a:avLst/>
-          </a:prstGeom>
-          <a:solidFill xmlns:a="http://schemas.openxmlformats.org/drawingml/2006/main">
-            <a:srgbClr val="2C3E50"/>
-          </a:solidFill>
-          <a:ln xmlns:a="http://schemas.openxmlformats.org/drawingml/2006/main" w="6350">
-            <a:solidFill>
-              <a:srgbClr val="5DADE2"/>
-            </a:solidFill>
-          </a:ln>
-        </p:spPr>
-        <p:txBody>
-          <a:bodyPr xmlns:a="http://schemas.openxmlformats.org/drawingml/2006/main"/>
-          <a:lstStyle xmlns:a="http://schemas.openxmlformats.org/drawingml/2006/main"/>
-          <a:p xmlns:a="http://schemas.openxmlformats.org/drawingml/2006/main">
-            <a:r>
-              <a:rPr lang="en-US" sz="1200">
-                <a:solidFill>
-                  <a:srgbClr val="FFFFFF"/>
-                </a:solidFill>
-                <a:latin typeface="Consolas"/>
-                <a:ea typeface="Consolas"/>
-              </a:rPr>
-              <a:t>checker</a:t>
-            </a:r>
-          </a:p>
-        </p:txBody>
-      </p:sp>
-      <p:sp>
-        <p:nvSpPr>
-          <p:cNvPr id="100034" name="TextBox 14"/>
-          <p:cNvSpPr/>
-          <p:nvPr/>
-        </p:nvSpPr>
-        <p:spPr>
-          <a:xfrm xmlns:a="http://schemas.openxmlformats.org/drawingml/2006/main">
-            <a:off x="360000" y="4140000"/>
-            <a:ext cx="1800000" cy="648000"/>
-          </a:xfrm>
-          <a:prstGeom xmlns:a="http://schemas.openxmlformats.org/drawingml/2006/main" prst="roundRect">
-            <a:avLst/>
-          </a:prstGeom>
-          <a:solidFill xmlns:a="http://schemas.openxmlformats.org/drawingml/2006/main">
-            <a:srgbClr val="2C3E50"/>
-          </a:solidFill>
-          <a:ln xmlns:a="http://schemas.openxmlformats.org/drawingml/2006/main" w="6350">
-            <a:solidFill>
-              <a:srgbClr val="5DADE2"/>
-            </a:solidFill>
-          </a:ln>
-        </p:spPr>
-        <p:txBody>
-          <a:bodyPr xmlns:a="http://schemas.openxmlformats.org/drawingml/2006/main"/>
-          <a:lstStyle xmlns:a="http://schemas.openxmlformats.org/drawingml/2006/main"/>
-          <a:p xmlns:a="http://schemas.openxmlformats.org/drawingml/2006/main">
-            <a:r>
-              <a:rPr lang="en-US" sz="1200">
-                <a:solidFill>
-                  <a:srgbClr val="FFFFFF"/>
-                </a:solidFill>
-                <a:latin typeface="Consolas"/>
-                <a:ea typeface="Consolas"/>
-              </a:rPr>
-              <a:t>strips</a:t>
+              <a:t>path=custom (d=)</a:t>
             </a:r>
           </a:p>
         </p:txBody>
@@ -3210,6 +3492,290 @@
   <p:transition>
     <p:split orient="horz"/>
   </p:transition>
+  <p:timing>
+    <p:tnLst>
+      <p:par>
+        <p:cTn id="1" dur="indefinite" restart="never" nodeType="tmRoot">
+          <p:childTnLst>
+            <p:seq concurrent="1" nextAc="seek">
+              <p:cTn id="2" dur="indefinite" nodeType="mainSeq">
+                <p:childTnLst>
+                  <p:par>
+                    <p:cTn id="6" fill="hold">
+                      <p:stCondLst>
+                        <p:cond delay="indefinite"/>
+                      </p:stCondLst>
+                      <p:childTnLst>
+                        <p:par>
+                          <p:cTn id="5" fill="hold">
+                            <p:stCondLst>
+                              <p:cond delay="0"/>
+                            </p:stCondLst>
+                            <p:childTnLst>
+                              <p:par>
+                                <p:cTn id="3" presetID="26" presetClass="path" presetSubtype="0" fill="hold" grpId="0" nodeType="clickEffect">
+                                  <p:stCondLst>
+                                    <p:cond delay="0"/>
+                                  </p:stCondLst>
+                                  <p:childTnLst>
+                                    <p:animMotion origin="layout" path="M 0 0 L 0.5 0 E" pathEditMode="relative">
+                                      <p:cBhvr>
+                                        <p:cTn id="4" dur="1000"/>
+                                        <p:tgtEl>
+                                          <p:spTgt spid="100028"/>
+                                        </p:tgtEl>
+                                      </p:cBhvr>
+                                    </p:animMotion>
+                                  </p:childTnLst>
+                                </p:cTn>
+                              </p:par>
+                            </p:childTnLst>
+                          </p:cTn>
+                        </p:par>
+                      </p:childTnLst>
+                    </p:cTn>
+                  </p:par>
+                  <p:par>
+                    <p:cTn id="10" fill="hold">
+                      <p:stCondLst>
+                        <p:cond delay="indefinite"/>
+                      </p:stCondLst>
+                      <p:childTnLst>
+                        <p:par>
+                          <p:cTn id="9" fill="hold">
+                            <p:stCondLst>
+                              <p:cond delay="0"/>
+                            </p:stCondLst>
+                            <p:childTnLst>
+                              <p:par>
+                                <p:cTn id="7" presetID="26" presetClass="path" presetSubtype="0" fill="hold" grpId="1" nodeType="clickEffect">
+                                  <p:stCondLst>
+                                    <p:cond delay="0"/>
+                                  </p:stCondLst>
+                                  <p:childTnLst>
+                                    <p:animMotion origin="layout" path="M 0 0 L 0 0.5 E" pathEditMode="relative">
+                                      <p:cBhvr>
+                                        <p:cTn id="8" dur="1000"/>
+                                        <p:tgtEl>
+                                          <p:spTgt spid="100029"/>
+                                        </p:tgtEl>
+                                      </p:cBhvr>
+                                    </p:animMotion>
+                                  </p:childTnLst>
+                                </p:cTn>
+                              </p:par>
+                            </p:childTnLst>
+                          </p:cTn>
+                        </p:par>
+                      </p:childTnLst>
+                    </p:cTn>
+                  </p:par>
+                  <p:par>
+                    <p:cTn id="14" fill="hold">
+                      <p:stCondLst>
+                        <p:cond delay="indefinite"/>
+                      </p:stCondLst>
+                      <p:childTnLst>
+                        <p:par>
+                          <p:cTn id="13" fill="hold">
+                            <p:stCondLst>
+                              <p:cond delay="0"/>
+                            </p:stCondLst>
+                            <p:childTnLst>
+                              <p:par>
+                                <p:cTn id="11" presetID="26" presetClass="path" presetSubtype="0" fill="hold" grpId="2" nodeType="clickEffect">
+                                  <p:stCondLst>
+                                    <p:cond delay="0"/>
+                                  </p:stCondLst>
+                                  <p:childTnLst>
+                                    <p:animMotion origin="layout" path="M 0 0 C 0 0 0.25 -0.25 0.5 0 E" pathEditMode="relative">
+                                      <p:cBhvr>
+                                        <p:cTn id="12" dur="1000"/>
+                                        <p:tgtEl>
+                                          <p:spTgt spid="100030"/>
+                                        </p:tgtEl>
+                                      </p:cBhvr>
+                                    </p:animMotion>
+                                  </p:childTnLst>
+                                </p:cTn>
+                              </p:par>
+                            </p:childTnLst>
+                          </p:cTn>
+                        </p:par>
+                      </p:childTnLst>
+                    </p:cTn>
+                  </p:par>
+                  <p:par>
+                    <p:cTn id="18" fill="hold">
+                      <p:stCondLst>
+                        <p:cond delay="indefinite"/>
+                      </p:stCondLst>
+                      <p:childTnLst>
+                        <p:par>
+                          <p:cTn id="17" fill="hold">
+                            <p:stCondLst>
+                              <p:cond delay="0"/>
+                            </p:stCondLst>
+                            <p:childTnLst>
+                              <p:par>
+                                <p:cTn id="15" presetID="26" presetClass="path" presetSubtype="0" fill="hold" grpId="3" nodeType="clickEffect">
+                                  <p:stCondLst>
+                                    <p:cond delay="0"/>
+                                  </p:stCondLst>
+                                  <p:childTnLst>
+                                    <p:animMotion origin="layout" path="M 0 0 C -0.083 0 -0.15 -0.067 -0.15 -0.15 C -0.15 -0.233 -0.083 -0.3 0 -0.3 C 0.083 -0.3 0.15 -0.233 0.15 -0.15 C 0.15 -0.067 0.083 0 0 0 Z E" pathEditMode="relative">
+                                      <p:cBhvr>
+                                        <p:cTn id="16" dur="1000"/>
+                                        <p:tgtEl>
+                                          <p:spTgt spid="100031"/>
+                                        </p:tgtEl>
+                                      </p:cBhvr>
+                                    </p:animMotion>
+                                  </p:childTnLst>
+                                </p:cTn>
+                              </p:par>
+                            </p:childTnLst>
+                          </p:cTn>
+                        </p:par>
+                      </p:childTnLst>
+                    </p:cTn>
+                  </p:par>
+                  <p:par>
+                    <p:cTn id="22" fill="hold">
+                      <p:stCondLst>
+                        <p:cond delay="indefinite"/>
+                      </p:stCondLst>
+                      <p:childTnLst>
+                        <p:par>
+                          <p:cTn id="21" fill="hold">
+                            <p:stCondLst>
+                              <p:cond delay="0"/>
+                            </p:stCondLst>
+                            <p:childTnLst>
+                              <p:par>
+                                <p:cTn id="19" presetID="26" presetClass="path" presetSubtype="0" fill="hold" grpId="4" nodeType="clickEffect">
+                                  <p:stCondLst>
+                                    <p:cond delay="0"/>
+                                  </p:stCondLst>
+                                  <p:childTnLst>
+                                    <p:animMotion origin="layout" path="M 0 0 L 0.15 -0.15 L 0 -0.3 L -0.15 -0.15 Z E" pathEditMode="relative">
+                                      <p:cBhvr>
+                                        <p:cTn id="20" dur="1000"/>
+                                        <p:tgtEl>
+                                          <p:spTgt spid="100032"/>
+                                        </p:tgtEl>
+                                      </p:cBhvr>
+                                    </p:animMotion>
+                                  </p:childTnLst>
+                                </p:cTn>
+                              </p:par>
+                            </p:childTnLst>
+                          </p:cTn>
+                        </p:par>
+                      </p:childTnLst>
+                    </p:cTn>
+                  </p:par>
+                  <p:par>
+                    <p:cTn id="26" fill="hold">
+                      <p:stCondLst>
+                        <p:cond delay="indefinite"/>
+                      </p:stCondLst>
+                      <p:childTnLst>
+                        <p:par>
+                          <p:cTn id="25" fill="hold">
+                            <p:stCondLst>
+                              <p:cond delay="0"/>
+                            </p:stCondLst>
+                            <p:childTnLst>
+                              <p:par>
+                                <p:cTn id="23" presetID="26" presetClass="path" presetSubtype="0" fill="hold" grpId="5" nodeType="clickEffect">
+                                  <p:stCondLst>
+                                    <p:cond delay="0"/>
+                                  </p:stCondLst>
+                                  <p:childTnLst>
+                                    <p:animMotion origin="layout" path="M 0 0 L 0.3 0 L 0.3 -0.3 L 0 -0.3 Z E" pathEditMode="relative">
+                                      <p:cBhvr>
+                                        <p:cTn id="24" dur="1000"/>
+                                        <p:tgtEl>
+                                          <p:spTgt spid="100033"/>
+                                        </p:tgtEl>
+                                      </p:cBhvr>
+                                    </p:animMotion>
+                                  </p:childTnLst>
+                                </p:cTn>
+                              </p:par>
+                            </p:childTnLst>
+                          </p:cTn>
+                        </p:par>
+                      </p:childTnLst>
+                    </p:cTn>
+                  </p:par>
+                  <p:par>
+                    <p:cTn id="30" fill="hold">
+                      <p:stCondLst>
+                        <p:cond delay="indefinite"/>
+                      </p:stCondLst>
+                      <p:childTnLst>
+                        <p:par>
+                          <p:cTn id="29" fill="hold">
+                            <p:stCondLst>
+                              <p:cond delay="0"/>
+                            </p:stCondLst>
+                            <p:childTnLst>
+                              <p:par>
+                                <p:cTn id="27" presetID="26" presetClass="path" presetSubtype="0" fill="hold" grpId="6" nodeType="clickEffect">
+                                  <p:stCondLst>
+                                    <p:cond delay="0"/>
+                                  </p:stCondLst>
+                                  <p:childTnLst>
+                                    <p:animMotion origin="layout" path="M 0 0 L 0.3 -0.1 L 0.6 0.1 E" pathEditMode="relative">
+                                      <p:cBhvr>
+                                        <p:cTn id="28" dur="1500"/>
+                                        <p:tgtEl>
+                                          <p:spTgt spid="100034"/>
+                                        </p:tgtEl>
+                                      </p:cBhvr>
+                                    </p:animMotion>
+                                  </p:childTnLst>
+                                </p:cTn>
+                              </p:par>
+                            </p:childTnLst>
+                          </p:cTn>
+                        </p:par>
+                      </p:childTnLst>
+                    </p:cTn>
+                  </p:par>
+                </p:childTnLst>
+              </p:cTn>
+              <p:prevCondLst>
+                <p:cond evt="onPrev" delay="0">
+                  <p:tgtEl>
+                    <p:sldTgt/>
+                  </p:tgtEl>
+                </p:cond>
+              </p:prevCondLst>
+              <p:nextCondLst>
+                <p:cond evt="onNext" delay="0">
+                  <p:tgtEl>
+                    <p:sldTgt/>
+                  </p:tgtEl>
+                </p:cond>
+              </p:nextCondLst>
+            </p:seq>
+          </p:childTnLst>
+        </p:cTn>
+      </p:par>
+    </p:tnLst>
+    <p:bldLst>
+      <p:bldP spid="100028" grpId="0"/>
+      <p:bldP spid="100029" grpId="1"/>
+      <p:bldP spid="100030" grpId="2"/>
+      <p:bldP spid="100031" grpId="3"/>
+      <p:bldP spid="100032" grpId="4"/>
+      <p:bldP spid="100033" grpId="5"/>
+      <p:bldP spid="100034" grpId="6"/>
+    </p:bldLst>
+  </p:timing>
 </p:sld>
 </file>
 
@@ -3254,7 +3820,7 @@
                   <a:srgbClr val="FFFFFF"/>
                 </a:solidFill>
               </a:rPr>
-              <a:t>Timing &amp; Triggers</a:t>
+              <a:t>Timing &amp; Trigger Chaining</a:t>
             </a:r>
           </a:p>
         </p:txBody>
@@ -3268,7 +3834,7 @@
         <p:spPr>
           <a:xfrm xmlns:a="http://schemas.openxmlformats.org/drawingml/2006/main">
             <a:off x="360000" y="1440000"/>
-            <a:ext cx="2520000" cy="1080000"/>
+            <a:ext cx="2160000" cy="720000"/>
           </a:xfrm>
           <a:prstGeom xmlns:a="http://schemas.openxmlformats.org/drawingml/2006/main" prst="roundRect">
             <a:avLst/>
@@ -3289,7 +3855,7 @@
                 <a:latin typeface="Consolas"/>
                 <a:ea typeface="Consolas"/>
               </a:rPr>
-              <a:t>Click to animate</a:t>
+              <a:t>1. onClick</a:t>
             </a:r>
           </a:p>
           <a:p xmlns:a="http://schemas.openxmlformats.org/drawingml/2006/main">
@@ -3301,7 +3867,7 @@
                 <a:latin typeface="Consolas"/>
                 <a:ea typeface="Consolas"/>
               </a:rPr>
-              <a:t>(default trigger)</a:t>
+              <a:t>(starts chain)</a:t>
             </a:r>
           </a:p>
         </p:txBody>
@@ -3315,7 +3881,7 @@
         <p:spPr>
           <a:xfrm xmlns:a="http://schemas.openxmlformats.org/drawingml/2006/main">
             <a:off x="3240000" y="1440000"/>
-            <a:ext cx="2520000" cy="1080000"/>
+            <a:ext cx="2160000" cy="720000"/>
           </a:xfrm>
           <a:prstGeom xmlns:a="http://schemas.openxmlformats.org/drawingml/2006/main" prst="roundRect">
             <a:avLst/>
@@ -3336,7 +3902,7 @@
                 <a:latin typeface="Consolas"/>
                 <a:ea typeface="Consolas"/>
               </a:rPr>
-              <a:t>After previous</a:t>
+              <a:t>2. afterPrevious</a:t>
             </a:r>
           </a:p>
           <a:p xmlns:a="http://schemas.openxmlformats.org/drawingml/2006/main">
@@ -3348,7 +3914,7 @@
                 <a:latin typeface="Consolas"/>
                 <a:ea typeface="Consolas"/>
               </a:rPr>
-              <a:t>(auto-follows)</a:t>
+              <a:t>(auto-follows #1)</a:t>
             </a:r>
           </a:p>
         </p:txBody>
@@ -3362,7 +3928,7 @@
         <p:spPr>
           <a:xfrm xmlns:a="http://schemas.openxmlformats.org/drawingml/2006/main">
             <a:off x="6120000" y="1440000"/>
-            <a:ext cx="2520000" cy="1080000"/>
+            <a:ext cx="2160000" cy="720000"/>
           </a:xfrm>
           <a:prstGeom xmlns:a="http://schemas.openxmlformats.org/drawingml/2006/main" prst="roundRect">
             <a:avLst/>
@@ -3383,7 +3949,7 @@
                 <a:latin typeface="Consolas"/>
                 <a:ea typeface="Consolas"/>
               </a:rPr>
-              <a:t>With previous</a:t>
+              <a:t>3. withPrevious</a:t>
             </a:r>
           </a:p>
           <a:p xmlns:a="http://schemas.openxmlformats.org/drawingml/2006/main">
@@ -3395,7 +3961,7 @@
                 <a:latin typeface="Consolas"/>
                 <a:ea typeface="Consolas"/>
               </a:rPr>
-              <a:t>(simultaneous)</a:t>
+              <a:t>(with #2)</a:t>
             </a:r>
           </a:p>
         </p:txBody>
@@ -3408,8 +3974,8 @@
         </p:nvSpPr>
         <p:spPr>
           <a:xfrm xmlns:a="http://schemas.openxmlformats.org/drawingml/2006/main">
-            <a:off x="360000" y="3240000"/>
-            <a:ext cx="3960000" cy="1080000"/>
+            <a:off x="1800000" y="2880000"/>
+            <a:ext cx="2160000" cy="720000"/>
           </a:xfrm>
           <a:prstGeom xmlns:a="http://schemas.openxmlformats.org/drawingml/2006/main" prst="roundRect">
             <a:avLst/>
@@ -3430,7 +3996,19 @@
                 <a:latin typeface="Consolas"/>
                 <a:ea typeface="Consolas"/>
               </a:rPr>
-              <a:t>Slow (2000ms)</a:t>
+              <a:t>4. afterPrevious</a:t>
+            </a:r>
+          </a:p>
+          <a:p xmlns:a="http://schemas.openxmlformats.org/drawingml/2006/main">
+            <a:r>
+              <a:rPr lang="en-US" sz="1300">
+                <a:solidFill>
+                  <a:srgbClr val="FFFFFF"/>
+                </a:solidFill>
+                <a:latin typeface="Consolas"/>
+                <a:ea typeface="Consolas"/>
+              </a:rPr>
+              <a:t>+ delay=800</a:t>
             </a:r>
           </a:p>
         </p:txBody>
@@ -3443,8 +4021,8 @@
         </p:nvSpPr>
         <p:spPr>
           <a:xfrm xmlns:a="http://schemas.openxmlformats.org/drawingml/2006/main">
-            <a:off x="4680000" y="3240000"/>
-            <a:ext cx="3960000" cy="1080000"/>
+            <a:off x="4680000" y="2880000"/>
+            <a:ext cx="2160000" cy="720000"/>
           </a:xfrm>
           <a:prstGeom xmlns:a="http://schemas.openxmlformats.org/drawingml/2006/main" prst="roundRect">
             <a:avLst/>
@@ -3465,7 +4043,7 @@
                 <a:latin typeface="Consolas"/>
                 <a:ea typeface="Consolas"/>
               </a:rPr>
-              <a:t>Fast (200ms)</a:t>
+              <a:t>5. slow duration=2000</a:t>
             </a:r>
           </a:p>
         </p:txBody>
@@ -3474,12 +4052,12 @@
   </p:cSld>
   <mc:AlternateContent>
     <mc:Choice Requires="p14">
-      <p:transition xmlns:p14="http://schemas.microsoft.com/office/powerpoint/2010/main" advTm="5000">
+      <p:transition xmlns:p14="http://schemas.microsoft.com/office/powerpoint/2010/main">
         <p14:reveal dir="l"/>
       </p:transition>
     </mc:Choice>
     <mc:Fallback>
-      <p:transition advTm="5000">
+      <p:transition>
         <p:fade/>
       </p:transition>
     </mc:Fallback>
@@ -3583,7 +4161,7 @@
                                     </p:set>
                                     <p:anim calcmode="lin" valueType="num">
                                       <p:cBhvr additive="base">
-                                        <p:cTn id="13" dur="500" fill="hold"/>
+                                        <p:cTn id="13" dur="600" fill="hold"/>
                                         <p:tgtEl>
                                           <p:spTgt spid="100036"/>
                                         </p:tgtEl>
@@ -3642,7 +4220,7 @@
                                     </p:set>
                                     <p:animScale zoomContents="1">
                                       <p:cBhvr>
-                                        <p:cTn id="18" dur="500" fill="hold"/>
+                                        <p:cTn id="18" dur="600" fill="hold"/>
                                         <p:tgtEl>
                                           <p:spTgt spid="100037"/>
                                         </p:tgtEl>
@@ -3668,7 +4246,7 @@
                         <p:par>
                           <p:cTn id="25" fill="hold">
                             <p:stCondLst>
-                              <p:cond delay="0"/>
+                              <p:cond delay="800"/>
                             </p:stCondLst>
                             <p:childTnLst>
                               <p:par>
@@ -3697,7 +4275,7 @@
                                     </p:set>
                                     <p:animEffect transition="in" filter="wipe(left)">
                                       <p:cBhvr>
-                                        <p:cTn id="23" dur="2000"/>
+                                        <p:cTn id="23" dur="700"/>
                                         <p:tgtEl>
                                           <p:spTgt spid="100038"/>
                                         </p:tgtEl>
@@ -3750,7 +4328,7 @@
                                     </p:set>
                                     <p:animEffect transition="in" filter="wipe(left)">
                                       <p:cBhvr>
-                                        <p:cTn id="29" dur="200"/>
+                                        <p:cTn id="29" dur="2000"/>
                                         <p:tgtEl>
                                           <p:spTgt spid="100039"/>
                                         </p:tgtEl>
@@ -3792,6 +4370,447 @@
       <p:bldP spid="100037" grpId="2"/>
       <p:bldP spid="100038" grpId="3"/>
       <p:bldP spid="100039" grpId="4"/>
+    </p:bldLst>
+  </p:timing>
+</p:sld>
+</file>
+
+<file path=ppt/slides/slide7.xml><?xml version="1.0" encoding="utf-8"?>
+<p:sld xmlns:p="http://schemas.openxmlformats.org/presentationml/2006/main">
+  <p:cSld>
+    <p:bg>
+      <p:bgPr>
+        <a:solidFill xmlns:a="http://schemas.openxmlformats.org/drawingml/2006/main">
+          <a:srgbClr val="1B2838"/>
+        </a:solidFill>
+      </p:bgPr>
+    </p:bg>
+    <p:spTree>
+      <p:nvGrpSpPr>
+        <p:cNvPr id="1" name=""/>
+        <p:cNvGrpSpPr/>
+        <p:nvPr/>
+      </p:nvGrpSpPr>
+      <p:grpSpPr/>
+      <p:sp>
+        <p:nvSpPr>
+          <p:cNvPr id="2" name="Title"/>
+          <p:cNvSpPr/>
+          <p:nvPr>
+            <p:ph type="title"/>
+          </p:nvPr>
+        </p:nvSpPr>
+        <p:spPr>
+          <a:xfrm xmlns:a="http://schemas.openxmlformats.org/drawingml/2006/main">
+            <a:off x="838200" y="365125"/>
+            <a:ext cx="10515600" cy="1320800"/>
+          </a:xfrm>
+        </p:spPr>
+        <p:txBody>
+          <a:bodyPr xmlns:a="http://schemas.openxmlformats.org/drawingml/2006/main"/>
+          <a:lstStyle xmlns:a="http://schemas.openxmlformats.org/drawingml/2006/main"/>
+          <a:p xmlns:a="http://schemas.openxmlformats.org/drawingml/2006/main">
+            <a:r>
+              <a:rPr lang="en-US" sz="2800">
+                <a:solidFill>
+                  <a:srgbClr val="FFFFFF"/>
+                </a:solidFill>
+              </a:rPr>
+              <a:t>Repeat · autoReverse · Restart</a:t>
+            </a:r>
+          </a:p>
+        </p:txBody>
+      </p:sp>
+      <p:sp>
+        <p:nvSpPr>
+          <p:cNvPr id="100040" name="TextBox 2"/>
+          <p:cNvSpPr/>
+          <p:nvPr/>
+        </p:nvSpPr>
+        <p:spPr>
+          <a:xfrm xmlns:a="http://schemas.openxmlformats.org/drawingml/2006/main">
+            <a:off x="720000" y="1800000"/>
+            <a:ext cx="1440000" cy="1440000"/>
+          </a:xfrm>
+          <a:prstGeom xmlns:a="http://schemas.openxmlformats.org/drawingml/2006/main" prst="ellipse">
+            <a:avLst/>
+          </a:prstGeom>
+          <a:solidFill xmlns:a="http://schemas.openxmlformats.org/drawingml/2006/main">
+            <a:srgbClr val="E74C3C"/>
+          </a:solidFill>
+        </p:spPr>
+        <p:txBody>
+          <a:bodyPr xmlns:a="http://schemas.openxmlformats.org/drawingml/2006/main"/>
+          <a:lstStyle xmlns:a="http://schemas.openxmlformats.org/drawingml/2006/main"/>
+          <a:p xmlns:a="http://schemas.openxmlformats.org/drawingml/2006/main">
+            <a:r>
+              <a:rPr lang="en-US" sz="1400">
+                <a:solidFill>
+                  <a:srgbClr val="FFFFFF"/>
+                </a:solidFill>
+                <a:latin typeface="Consolas"/>
+                <a:ea typeface="Consolas"/>
+              </a:rPr>
+              <a:t>repeat=3</a:t>
+            </a:r>
+          </a:p>
+        </p:txBody>
+      </p:sp>
+      <p:sp>
+        <p:nvSpPr>
+          <p:cNvPr id="100041" name="TextBox 3"/>
+          <p:cNvSpPr/>
+          <p:nvPr/>
+        </p:nvSpPr>
+        <p:spPr>
+          <a:xfrm xmlns:a="http://schemas.openxmlformats.org/drawingml/2006/main">
+            <a:off x="2880000" y="1800000"/>
+            <a:ext cx="1440000" cy="1440000"/>
+          </a:xfrm>
+          <a:prstGeom xmlns:a="http://schemas.openxmlformats.org/drawingml/2006/main" prst="ellipse">
+            <a:avLst/>
+          </a:prstGeom>
+          <a:solidFill xmlns:a="http://schemas.openxmlformats.org/drawingml/2006/main">
+            <a:srgbClr val="2E86C1"/>
+          </a:solidFill>
+        </p:spPr>
+        <p:txBody>
+          <a:bodyPr xmlns:a="http://schemas.openxmlformats.org/drawingml/2006/main"/>
+          <a:lstStyle xmlns:a="http://schemas.openxmlformats.org/drawingml/2006/main"/>
+          <a:p xmlns:a="http://schemas.openxmlformats.org/drawingml/2006/main">
+            <a:r>
+              <a:rPr lang="en-US" sz="1300">
+                <a:solidFill>
+                  <a:srgbClr val="FFFFFF"/>
+                </a:solidFill>
+                <a:latin typeface="Consolas"/>
+                <a:ea typeface="Consolas"/>
+              </a:rPr>
+              <a:t>repeat=indefinite</a:t>
+            </a:r>
+          </a:p>
+        </p:txBody>
+      </p:sp>
+      <p:sp>
+        <p:nvSpPr>
+          <p:cNvPr id="100042" name="TextBox 4"/>
+          <p:cNvSpPr/>
+          <p:nvPr/>
+        </p:nvSpPr>
+        <p:spPr>
+          <a:xfrm xmlns:a="http://schemas.openxmlformats.org/drawingml/2006/main">
+            <a:off x="5040000" y="1800000"/>
+            <a:ext cx="1440000" cy="1440000"/>
+          </a:xfrm>
+          <a:prstGeom xmlns:a="http://schemas.openxmlformats.org/drawingml/2006/main" prst="ellipse">
+            <a:avLst/>
+          </a:prstGeom>
+          <a:solidFill xmlns:a="http://schemas.openxmlformats.org/drawingml/2006/main">
+            <a:srgbClr val="27AE60"/>
+          </a:solidFill>
+        </p:spPr>
+        <p:txBody>
+          <a:bodyPr xmlns:a="http://schemas.openxmlformats.org/drawingml/2006/main"/>
+          <a:lstStyle xmlns:a="http://schemas.openxmlformats.org/drawingml/2006/main"/>
+          <a:p xmlns:a="http://schemas.openxmlformats.org/drawingml/2006/main">
+            <a:r>
+              <a:rPr lang="en-US" sz="1300">
+                <a:solidFill>
+                  <a:srgbClr val="FFFFFF"/>
+                </a:solidFill>
+                <a:latin typeface="Consolas"/>
+                <a:ea typeface="Consolas"/>
+              </a:rPr>
+              <a:t>autoReverse=true</a:t>
+            </a:r>
+          </a:p>
+        </p:txBody>
+      </p:sp>
+      <p:sp>
+        <p:nvSpPr>
+          <p:cNvPr id="100043" name="TextBox 5"/>
+          <p:cNvSpPr/>
+          <p:nvPr/>
+        </p:nvSpPr>
+        <p:spPr>
+          <a:xfrm xmlns:a="http://schemas.openxmlformats.org/drawingml/2006/main">
+            <a:off x="7200000" y="1800000"/>
+            <a:ext cx="1440000" cy="1440000"/>
+          </a:xfrm>
+          <a:prstGeom xmlns:a="http://schemas.openxmlformats.org/drawingml/2006/main" prst="ellipse">
+            <a:avLst/>
+          </a:prstGeom>
+          <a:solidFill xmlns:a="http://schemas.openxmlformats.org/drawingml/2006/main">
+            <a:srgbClr val="8E44AD"/>
+          </a:solidFill>
+        </p:spPr>
+        <p:txBody>
+          <a:bodyPr xmlns:a="http://schemas.openxmlformats.org/drawingml/2006/main"/>
+          <a:lstStyle xmlns:a="http://schemas.openxmlformats.org/drawingml/2006/main"/>
+          <a:p xmlns:a="http://schemas.openxmlformats.org/drawingml/2006/main">
+            <a:r>
+              <a:rPr lang="en-US" sz="1200">
+                <a:solidFill>
+                  <a:srgbClr val="FFFFFF"/>
+                </a:solidFill>
+                <a:latin typeface="Consolas"/>
+                <a:ea typeface="Consolas"/>
+              </a:rPr>
+              <a:t>restart=whenNotActive</a:t>
+            </a:r>
+          </a:p>
+        </p:txBody>
+      </p:sp>
+    </p:spTree>
+  </p:cSld>
+  <p:transition>
+    <p:zoom dir="in"/>
+  </p:transition>
+  <p:timing>
+    <p:tnLst>
+      <p:par>
+        <p:cTn id="1" dur="indefinite" restart="never" nodeType="tmRoot">
+          <p:childTnLst>
+            <p:seq concurrent="1" nextAc="seek">
+              <p:cTn id="2" dur="indefinite" nodeType="mainSeq">
+                <p:childTnLst>
+                  <p:par>
+                    <p:cTn id="6" fill="hold">
+                      <p:stCondLst>
+                        <p:cond delay="indefinite"/>
+                      </p:stCondLst>
+                      <p:childTnLst>
+                        <p:par>
+                          <p:cTn id="5" fill="hold">
+                            <p:stCondLst>
+                              <p:cond delay="0"/>
+                            </p:stCondLst>
+                            <p:childTnLst>
+                              <p:par>
+                                <p:cTn id="4" presetID="8" presetClass="emph" presetSubtype="0" dur="800" repeatCount="3000" fill="hold" grpId="0" nodeType="clickEffect">
+                                  <p:stCondLst>
+                                    <p:cond delay="0"/>
+                                  </p:stCondLst>
+                                  <p:childTnLst xmlns:p="http://schemas.openxmlformats.org/presentationml/2006/main" xmlns:a="http://schemas.openxmlformats.org/drawingml/2006/main" xmlns:r="http://schemas.openxmlformats.org/officeDocument/2006/relationships">
+                                    <p:animRot by="21600000">
+                                      <p:cBhvr>
+                                        <p:cTn id="3" dur="800" fill="hold"/>
+                                        <p:tgtEl>
+                                          <p:spTgt spid="100040"/>
+                                        </p:tgtEl>
+                                        <p:attrNameLst>
+                                          <p:attrName>r</p:attrName>
+                                        </p:attrNameLst>
+                                      </p:cBhvr>
+                                    </p:animRot>
+                                  </p:childTnLst>
+                                </p:cTn>
+                              </p:par>
+                            </p:childTnLst>
+                          </p:cTn>
+                        </p:par>
+                        <p:par>
+                          <p:cTn id="10" fill="hold">
+                            <p:stCondLst>
+                              <p:cond delay="0"/>
+                            </p:stCondLst>
+                            <p:childTnLst>
+                              <p:par>
+                                <p:cTn id="9" presetID="26" presetClass="emph" presetSubtype="0" dur="600" repeatCount="indefinite" fill="hold" grpId="1" nodeType="withEffect">
+                                  <p:stCondLst>
+                                    <p:cond delay="0"/>
+                                  </p:stCondLst>
+                                  <p:childTnLst xmlns:p="http://schemas.openxmlformats.org/presentationml/2006/main" xmlns:a="http://schemas.openxmlformats.org/drawingml/2006/main" xmlns:r="http://schemas.openxmlformats.org/officeDocument/2006/relationships">
+                                    <p:animEffect transition="out" filter="fade">
+                                      <p:cBhvr>
+                                        <p:cTn id="7" dur="600" tmFilter="0, 0; .2, .5; .8, .5; 1, 0"/>
+                                        <p:tgtEl>
+                                          <p:spTgt spid="100041"/>
+                                        </p:tgtEl>
+                                      </p:cBhvr>
+                                    </p:animEffect>
+                                    <p:animScale>
+                                      <p:cBhvr>
+                                        <p:cTn id="8" dur="250" autoRev="1" fill="hold"/>
+                                        <p:tgtEl>
+                                          <p:spTgt spid="100041"/>
+                                        </p:tgtEl>
+                                      </p:cBhvr>
+                                      <p:by x="105000" y="105000"/>
+                                    </p:animScale>
+                                  </p:childTnLst>
+                                </p:cTn>
+                              </p:par>
+                            </p:childTnLst>
+                          </p:cTn>
+                        </p:par>
+                      </p:childTnLst>
+                    </p:cTn>
+                  </p:par>
+                  <p:par>
+                    <p:cTn id="14" fill="hold">
+                      <p:stCondLst>
+                        <p:cond delay="indefinite"/>
+                      </p:stCondLst>
+                      <p:childTnLst>
+                        <p:par>
+                          <p:cTn id="13" fill="hold">
+                            <p:stCondLst>
+                              <p:cond delay="0"/>
+                            </p:stCondLst>
+                            <p:childTnLst>
+                              <p:par>
+                                <p:cTn id="12" presetID="6" presetClass="emph" presetSubtype="0" dur="700" repeatCount="2000" autoRev="1" fill="hold" grpId="2" nodeType="clickEffect">
+                                  <p:stCondLst>
+                                    <p:cond delay="0"/>
+                                  </p:stCondLst>
+                                  <p:childTnLst xmlns:p="http://schemas.openxmlformats.org/presentationml/2006/main" xmlns:a="http://schemas.openxmlformats.org/drawingml/2006/main" xmlns:r="http://schemas.openxmlformats.org/officeDocument/2006/relationships">
+                                    <p:animScale>
+                                      <p:cBhvr>
+                                        <p:cTn id="11" dur="700" fill="hold"/>
+                                        <p:tgtEl>
+                                          <p:spTgt spid="100042"/>
+                                        </p:tgtEl>
+                                      </p:cBhvr>
+                                      <p:by x="150000" y="150000"/>
+                                    </p:animScale>
+                                  </p:childTnLst>
+                                </p:cTn>
+                              </p:par>
+                            </p:childTnLst>
+                          </p:cTn>
+                        </p:par>
+                      </p:childTnLst>
+                    </p:cTn>
+                  </p:par>
+                  <p:par>
+                    <p:cTn id="22" fill="hold">
+                      <p:stCondLst>
+                        <p:cond delay="indefinite"/>
+                      </p:stCondLst>
+                      <p:childTnLst>
+                        <p:par>
+                          <p:cTn id="21" fill="hold">
+                            <p:stCondLst>
+                              <p:cond delay="0"/>
+                            </p:stCondLst>
+                            <p:childTnLst>
+                              <p:par>
+                                <p:cTn id="20" presetID="32" presetClass="emph" presetSubtype="0" dur="500" repeatCount="indefinite" restart="whenNotActive" fill="hold" grpId="3" nodeType="clickEffect">
+                                  <p:stCondLst>
+                                    <p:cond delay="0"/>
+                                  </p:stCondLst>
+                                  <p:childTnLst xmlns:p="http://schemas.openxmlformats.org/presentationml/2006/main" xmlns:a="http://schemas.openxmlformats.org/drawingml/2006/main" xmlns:r="http://schemas.openxmlformats.org/officeDocument/2006/relationships">
+                                    <p:animRot by="120000">
+                                      <p:cBhvr>
+                                        <p:cTn id="15" dur="500" fill="hold">
+                                          <p:stCondLst>
+                                            <p:cond delay="0"/>
+                                          </p:stCondLst>
+                                        </p:cTn>
+                                        <p:tgtEl>
+                                          <p:spTgt spid="100043"/>
+                                        </p:tgtEl>
+                                        <p:attrNameLst>
+                                          <p:attrName>r</p:attrName>
+                                        </p:attrNameLst>
+                                      </p:cBhvr>
+                                    </p:animRot>
+                                    <p:animRot by="-240000">
+                                      <p:cBhvr>
+                                        <p:cTn id="16" dur="200" fill="hold">
+                                          <p:stCondLst>
+                                            <p:cond delay="200"/>
+                                          </p:stCondLst>
+                                        </p:cTn>
+                                        <p:tgtEl>
+                                          <p:spTgt spid="100043"/>
+                                        </p:tgtEl>
+                                        <p:attrNameLst>
+                                          <p:attrName>r</p:attrName>
+                                        </p:attrNameLst>
+                                      </p:cBhvr>
+                                    </p:animRot>
+                                    <p:animRot by="240000">
+                                      <p:cBhvr>
+                                        <p:cTn id="17" dur="200" fill="hold">
+                                          <p:stCondLst>
+                                            <p:cond delay="400"/>
+                                          </p:stCondLst>
+                                        </p:cTn>
+                                        <p:tgtEl>
+                                          <p:spTgt spid="100043"/>
+                                        </p:tgtEl>
+                                        <p:attrNameLst>
+                                          <p:attrName>r</p:attrName>
+                                        </p:attrNameLst>
+                                      </p:cBhvr>
+                                    </p:animRot>
+                                    <p:animRot by="-240000">
+                                      <p:cBhvr>
+                                        <p:cTn id="18" dur="200" fill="hold">
+                                          <p:stCondLst>
+                                            <p:cond delay="600"/>
+                                          </p:stCondLst>
+                                        </p:cTn>
+                                        <p:tgtEl>
+                                          <p:spTgt spid="100043"/>
+                                        </p:tgtEl>
+                                        <p:attrNameLst>
+                                          <p:attrName>r</p:attrName>
+                                        </p:attrNameLst>
+                                      </p:cBhvr>
+                                    </p:animRot>
+                                    <p:animRot by="120000">
+                                      <p:cBhvr>
+                                        <p:cTn id="19" dur="200" fill="hold">
+                                          <p:stCondLst>
+                                            <p:cond delay="800"/>
+                                          </p:stCondLst>
+                                        </p:cTn>
+                                        <p:tgtEl>
+                                          <p:spTgt spid="100043"/>
+                                        </p:tgtEl>
+                                        <p:attrNameLst>
+                                          <p:attrName>r</p:attrName>
+                                        </p:attrNameLst>
+                                      </p:cBhvr>
+                                    </p:animRot>
+                                  </p:childTnLst>
+                                </p:cTn>
+                              </p:par>
+                            </p:childTnLst>
+                          </p:cTn>
+                        </p:par>
+                      </p:childTnLst>
+                    </p:cTn>
+                  </p:par>
+                </p:childTnLst>
+              </p:cTn>
+              <p:prevCondLst>
+                <p:cond evt="onPrev" delay="0">
+                  <p:tgtEl>
+                    <p:sldTgt/>
+                  </p:tgtEl>
+                </p:cond>
+              </p:prevCondLst>
+              <p:nextCondLst>
+                <p:cond evt="onNext" delay="0">
+                  <p:tgtEl>
+                    <p:sldTgt/>
+                  </p:tgtEl>
+                </p:cond>
+              </p:nextCondLst>
+            </p:seq>
+          </p:childTnLst>
+        </p:cTn>
+      </p:par>
+    </p:tnLst>
+    <p:bldLst>
+      <p:bldP spid="100040" grpId="0"/>
+      <p:bldP spid="100041" grpId="1"/>
+      <p:bldP spid="100042" grpId="2"/>
+      <p:bldP spid="100043" grpId="3"/>
     </p:bldLst>
   </p:timing>
 </p:sld>
